--- a/Presentation1.pptx
+++ b/Presentation1.pptx
@@ -5,10 +5,12 @@
     <p:sldMasterId id="2147483648" r:id="rId1"/>
   </p:sldMasterIdLst>
   <p:notesMasterIdLst>
-    <p:notesMasterId r:id="rId5"/>
+    <p:notesMasterId r:id="rId7"/>
   </p:notesMasterIdLst>
   <p:sldIdLst>
     <p:sldId id="256" r:id="rId4"/>
+    <p:sldId id="257" r:id="rId5"/>
+    <p:sldId id="258" r:id="rId6"/>
   </p:sldIdLst>
   <p:sldSz cx="12192000" cy="6858000"/>
   <p:notesSz cx="6858000" cy="9144000"/>
@@ -134,7 +136,7 @@
       </p:grpSpPr>
       <p:sp>
         <p:nvSpPr>
-          <p:cNvPr id="941184825" name="Header Placeholder 1"/>
+          <p:cNvPr id="1996318528" name="Header Placeholder 1"/>
           <p:cNvSpPr>
             <a:spLocks noGrp="1"/>
           </p:cNvSpPr>
@@ -168,7 +170,7 @@
       </p:sp>
       <p:sp>
         <p:nvSpPr>
-          <p:cNvPr id="1346810994" name="Date Placeholder 2"/>
+          <p:cNvPr id="2020777350" name="Date Placeholder 2"/>
           <p:cNvSpPr>
             <a:spLocks noGrp="1"/>
           </p:cNvSpPr>
@@ -206,7 +208,7 @@
       </p:sp>
       <p:sp>
         <p:nvSpPr>
-          <p:cNvPr id="1924547016" name="Slide Image Placeholder 3"/>
+          <p:cNvPr id="361207120" name="Slide Image Placeholder 3"/>
           <p:cNvSpPr>
             <a:spLocks noChangeAspect="1" noGrp="1" noRot="1"/>
           </p:cNvSpPr>
@@ -242,7 +244,7 @@
       </p:sp>
       <p:sp>
         <p:nvSpPr>
-          <p:cNvPr id="1174273421" name="Notes Placeholder 4"/>
+          <p:cNvPr id="1837331040" name="Notes Placeholder 4"/>
           <p:cNvSpPr>
             <a:spLocks noGrp="1"/>
           </p:cNvSpPr>
@@ -316,7 +318,7 @@
       </p:sp>
       <p:sp>
         <p:nvSpPr>
-          <p:cNvPr id="943464286" name="Footer Placeholder 5"/>
+          <p:cNvPr id="281508638" name="Footer Placeholder 5"/>
           <p:cNvSpPr>
             <a:spLocks noGrp="1"/>
           </p:cNvSpPr>
@@ -350,7 +352,7 @@
       </p:sp>
       <p:sp>
         <p:nvSpPr>
-          <p:cNvPr id="1432836686" name="Slide Number Placeholder 6"/>
+          <p:cNvPr id="1569655618" name="Slide Number Placeholder 6"/>
           <p:cNvSpPr>
             <a:spLocks noGrp="1"/>
           </p:cNvSpPr>
@@ -503,7 +505,7 @@
       </p:grpSpPr>
       <p:sp>
         <p:nvSpPr>
-          <p:cNvPr id="649158105" name="Slide Image Placeholder 1"/>
+          <p:cNvPr id="489488497" name="Slide Image Placeholder 1"/>
           <p:cNvSpPr>
             <a:spLocks noChangeAspect="1" noGrp="1" noRot="1"/>
           </p:cNvSpPr>
@@ -520,7 +522,7 @@
       </p:sp>
       <p:sp>
         <p:nvSpPr>
-          <p:cNvPr id="693128126" name="Notes Placeholder 2"/>
+          <p:cNvPr id="783251289" name="Notes Placeholder 2"/>
           <p:cNvSpPr>
             <a:spLocks noGrp="1"/>
           </p:cNvSpPr>
@@ -545,7 +547,7 @@
       </p:sp>
       <p:sp>
         <p:nvSpPr>
-          <p:cNvPr id="826280649" name="Slide Number Placeholder 3"/>
+          <p:cNvPr id="1878712317" name="Slide Number Placeholder 3"/>
           <p:cNvSpPr>
             <a:spLocks noGrp="1"/>
           </p:cNvSpPr>
@@ -566,6 +568,176 @@
               <a:t>1</a:t>
             </a:fld>
             <a:endParaRPr lang="en-US"/>
+          </a:p>
+        </p:txBody>
+      </p:sp>
+    </p:spTree>
+  </p:cSld>
+  <p:clrMapOvr>
+    <a:masterClrMapping/>
+  </p:clrMapOvr>
+</p:notes>
+</file>
+
+<file path=ppt/notesSlides/notesSlide2.xml><?xml version="1.0" encoding="utf-8"?>
+<p:notes xmlns:a="http://schemas.openxmlformats.org/drawingml/2006/main" xmlns:r="http://schemas.openxmlformats.org/officeDocument/2006/relationships" xmlns:p="http://schemas.openxmlformats.org/presentationml/2006/main" xmlns:m="http://schemas.openxmlformats.org/officeDocument/2006/math" xmlns:w="http://schemas.openxmlformats.org/wordprocessingml/2006/main">
+  <p:cSld name="">
+    <p:spTree>
+      <p:nvGrpSpPr>
+        <p:cNvPr id="1" name=""/>
+        <p:cNvGrpSpPr/>
+        <p:nvPr/>
+      </p:nvGrpSpPr>
+      <p:grpSpPr bwMode="auto">
+        <a:xfrm>
+          <a:off x="0" y="0"/>
+          <a:ext cx="0" cy="0"/>
+          <a:chOff x="0" y="0"/>
+          <a:chExt cx="0" cy="0"/>
+        </a:xfrm>
+      </p:grpSpPr>
+      <p:sp>
+        <p:nvSpPr>
+          <p:cNvPr id="2" name="Slide Image Placeholder 1"/>
+          <p:cNvSpPr>
+            <a:spLocks noChangeAspect="1" noGrp="1" noRot="1"/>
+          </p:cNvSpPr>
+          <p:nvPr>
+            <p:ph type="sldImg"/>
+          </p:nvPr>
+        </p:nvSpPr>
+        <p:spPr bwMode="auto"/>
+      </p:sp>
+      <p:sp>
+        <p:nvSpPr>
+          <p:cNvPr id="3" name="Notes Placeholder 2"/>
+          <p:cNvSpPr>
+            <a:spLocks noGrp="1"/>
+          </p:cNvSpPr>
+          <p:nvPr>
+            <p:ph type="body" idx="1"/>
+          </p:nvPr>
+        </p:nvSpPr>
+        <p:spPr bwMode="auto"/>
+        <p:txBody>
+          <a:bodyPr/>
+          <a:lstStyle/>
+          <a:p>
+            <a:pPr>
+              <a:defRPr/>
+            </a:pPr>
+            <a:endParaRPr/>
+          </a:p>
+        </p:txBody>
+      </p:sp>
+      <p:sp>
+        <p:nvSpPr>
+          <p:cNvPr id="4" name="Slide Number Placeholder 3"/>
+          <p:cNvSpPr>
+            <a:spLocks noGrp="1"/>
+          </p:cNvSpPr>
+          <p:nvPr>
+            <p:ph type="sldNum" sz="quarter" idx="10"/>
+          </p:nvPr>
+        </p:nvSpPr>
+        <p:spPr bwMode="auto"/>
+        <p:txBody>
+          <a:bodyPr/>
+          <a:lstStyle/>
+          <a:p>
+            <a:pPr>
+              <a:defRPr/>
+            </a:pPr>
+            <a:fld id="{FE93F786-4848-4E32-526D-DE5E5F2F7ECB}" type="slidenum">
+              <a:rPr/>
+              <a:t/>
+            </a:fld>
+            <a:endParaRPr/>
+          </a:p>
+        </p:txBody>
+      </p:sp>
+    </p:spTree>
+  </p:cSld>
+  <p:clrMapOvr>
+    <a:masterClrMapping/>
+  </p:clrMapOvr>
+</p:notes>
+</file>
+
+<file path=ppt/notesSlides/notesSlide3.xml><?xml version="1.0" encoding="utf-8"?>
+<p:notes xmlns:a="http://schemas.openxmlformats.org/drawingml/2006/main" xmlns:r="http://schemas.openxmlformats.org/officeDocument/2006/relationships" xmlns:p="http://schemas.openxmlformats.org/presentationml/2006/main" xmlns:m="http://schemas.openxmlformats.org/officeDocument/2006/math" xmlns:w="http://schemas.openxmlformats.org/wordprocessingml/2006/main">
+  <p:cSld name="">
+    <p:spTree>
+      <p:nvGrpSpPr>
+        <p:cNvPr id="1" name=""/>
+        <p:cNvGrpSpPr/>
+        <p:nvPr/>
+      </p:nvGrpSpPr>
+      <p:grpSpPr bwMode="auto">
+        <a:xfrm>
+          <a:off x="0" y="0"/>
+          <a:ext cx="0" cy="0"/>
+          <a:chOff x="0" y="0"/>
+          <a:chExt cx="0" cy="0"/>
+        </a:xfrm>
+      </p:grpSpPr>
+      <p:sp>
+        <p:nvSpPr>
+          <p:cNvPr id="2" name="Slide Image Placeholder 1"/>
+          <p:cNvSpPr>
+            <a:spLocks noChangeAspect="1" noGrp="1" noRot="1"/>
+          </p:cNvSpPr>
+          <p:nvPr>
+            <p:ph type="sldImg"/>
+          </p:nvPr>
+        </p:nvSpPr>
+        <p:spPr bwMode="auto"/>
+      </p:sp>
+      <p:sp>
+        <p:nvSpPr>
+          <p:cNvPr id="3" name="Notes Placeholder 2"/>
+          <p:cNvSpPr>
+            <a:spLocks noGrp="1"/>
+          </p:cNvSpPr>
+          <p:nvPr>
+            <p:ph type="body" idx="1"/>
+          </p:nvPr>
+        </p:nvSpPr>
+        <p:spPr bwMode="auto"/>
+        <p:txBody>
+          <a:bodyPr/>
+          <a:lstStyle/>
+          <a:p>
+            <a:pPr>
+              <a:defRPr/>
+            </a:pPr>
+            <a:endParaRPr/>
+          </a:p>
+        </p:txBody>
+      </p:sp>
+      <p:sp>
+        <p:nvSpPr>
+          <p:cNvPr id="4" name="Slide Number Placeholder 3"/>
+          <p:cNvSpPr>
+            <a:spLocks noGrp="1"/>
+          </p:cNvSpPr>
+          <p:nvPr>
+            <p:ph type="sldNum" sz="quarter" idx="10"/>
+          </p:nvPr>
+        </p:nvSpPr>
+        <p:spPr bwMode="auto"/>
+        <p:txBody>
+          <a:bodyPr/>
+          <a:lstStyle/>
+          <a:p>
+            <a:pPr>
+              <a:defRPr/>
+            </a:pPr>
+            <a:fld id="{E8ED0A39-75C7-B932-380B-4EA504323ABC}" type="slidenum">
+              <a:rPr/>
+              <a:t/>
+            </a:fld>
+            <a:endParaRPr/>
           </a:p>
         </p:txBody>
       </p:sp>
@@ -596,7 +768,7 @@
       </p:grpSpPr>
       <p:sp>
         <p:nvSpPr>
-          <p:cNvPr id="1086563575" name="Title 1"/>
+          <p:cNvPr id="1358474502" name="Title 1"/>
           <p:cNvSpPr>
             <a:spLocks noGrp="1"/>
           </p:cNvSpPr>
@@ -606,15 +778,15 @@
         </p:nvSpPr>
         <p:spPr bwMode="auto">
           <a:xfrm>
-            <a:off x="1524000" y="1122363"/>
-            <a:ext cx="9144000" cy="2387600"/>
+            <a:off x="1523999" y="1122362"/>
+            <a:ext cx="9144000" cy="2387599"/>
           </a:xfrm>
         </p:spPr>
         <p:txBody>
           <a:bodyPr anchor="b"/>
           <a:lstStyle>
             <a:lvl1pPr algn="ctr">
-              <a:defRPr sz="6000"/>
+              <a:defRPr sz="4500"/>
             </a:lvl1pPr>
           </a:lstStyle>
           <a:p>
@@ -622,16 +794,16 @@
               <a:defRPr/>
             </a:pPr>
             <a:r>
-              <a:rPr lang="en-US"/>
+              <a:rPr/>
               <a:t>Click to edit Master title style</a:t>
             </a:r>
-            <a:endParaRPr lang="en-US"/>
-          </a:p>
-        </p:txBody>
-      </p:sp>
-      <p:sp>
-        <p:nvSpPr>
-          <p:cNvPr id="533463953" name="Subtitle 2"/>
+            <a:endParaRPr/>
+          </a:p>
+        </p:txBody>
+      </p:sp>
+      <p:sp>
+        <p:nvSpPr>
+          <p:cNvPr id="1202949039" name="Subtitle 2"/>
           <p:cNvSpPr>
             <a:spLocks noGrp="1"/>
           </p:cNvSpPr>
@@ -641,7 +813,7 @@
         </p:nvSpPr>
         <p:spPr bwMode="auto">
           <a:xfrm>
-            <a:off x="1524000" y="3602038"/>
+            <a:off x="1523999" y="3602037"/>
             <a:ext cx="9144000" cy="1655762"/>
           </a:xfrm>
         </p:spPr>
@@ -650,39 +822,39 @@
           <a:lstStyle>
             <a:lvl1pPr marL="0" indent="0" algn="ctr">
               <a:buNone/>
-              <a:defRPr sz="2400"/>
+              <a:defRPr sz="1800"/>
             </a:lvl1pPr>
-            <a:lvl2pPr marL="457200" indent="0" algn="ctr">
-              <a:buNone/>
-              <a:defRPr sz="2000"/>
+            <a:lvl2pPr marL="342900" indent="0" algn="ctr">
+              <a:buNone/>
+              <a:defRPr sz="1500"/>
             </a:lvl2pPr>
-            <a:lvl3pPr marL="914400" indent="0" algn="ctr">
-              <a:buNone/>
-              <a:defRPr sz="1800"/>
+            <a:lvl3pPr marL="685800" indent="0" algn="ctr">
+              <a:buNone/>
+              <a:defRPr sz="1350"/>
             </a:lvl3pPr>
-            <a:lvl4pPr marL="1371600" indent="0" algn="ctr">
-              <a:buNone/>
-              <a:defRPr sz="1600"/>
+            <a:lvl4pPr marL="1028700" indent="0" algn="ctr">
+              <a:buNone/>
+              <a:defRPr sz="1200"/>
             </a:lvl4pPr>
-            <a:lvl5pPr marL="1828800" indent="0" algn="ctr">
-              <a:buNone/>
-              <a:defRPr sz="1600"/>
+            <a:lvl5pPr marL="1371600" indent="0" algn="ctr">
+              <a:buNone/>
+              <a:defRPr sz="1200"/>
             </a:lvl5pPr>
-            <a:lvl6pPr marL="2286000" indent="0" algn="ctr">
-              <a:buNone/>
-              <a:defRPr sz="1600"/>
+            <a:lvl6pPr marL="1714500" indent="0" algn="ctr">
+              <a:buNone/>
+              <a:defRPr sz="1200"/>
             </a:lvl6pPr>
-            <a:lvl7pPr marL="2743200" indent="0" algn="ctr">
-              <a:buNone/>
-              <a:defRPr sz="1600"/>
+            <a:lvl7pPr marL="2057400" indent="0" algn="ctr">
+              <a:buNone/>
+              <a:defRPr sz="1200"/>
             </a:lvl7pPr>
-            <a:lvl8pPr marL="3200400" indent="0" algn="ctr">
-              <a:buNone/>
-              <a:defRPr sz="1600"/>
+            <a:lvl8pPr marL="2400300" indent="0" algn="ctr">
+              <a:buNone/>
+              <a:defRPr sz="1200"/>
             </a:lvl8pPr>
-            <a:lvl9pPr marL="3657600" indent="0" algn="ctr">
-              <a:buNone/>
-              <a:defRPr sz="1600"/>
+            <a:lvl9pPr marL="2743200" indent="0" algn="ctr">
+              <a:buNone/>
+              <a:defRPr sz="1200"/>
             </a:lvl9pPr>
           </a:lstStyle>
           <a:p>
@@ -690,16 +862,16 @@
               <a:defRPr/>
             </a:pPr>
             <a:r>
-              <a:rPr lang="en-US"/>
+              <a:rPr/>
               <a:t>Click to edit Master subtitle style</a:t>
             </a:r>
-            <a:endParaRPr lang="en-US"/>
-          </a:p>
-        </p:txBody>
-      </p:sp>
-      <p:sp>
-        <p:nvSpPr>
-          <p:cNvPr id="1650383866" name="Date Placeholder 3"/>
+            <a:endParaRPr/>
+          </a:p>
+        </p:txBody>
+      </p:sp>
+      <p:sp>
+        <p:nvSpPr>
+          <p:cNvPr id="1146327539" name="Date Placeholder 3"/>
           <p:cNvSpPr>
             <a:spLocks noGrp="1"/>
           </p:cNvSpPr>
@@ -716,16 +888,16 @@
               <a:defRPr/>
             </a:pPr>
             <a:fld id="{BCC18F51-09EC-435C-A3BA-64A766E099C0}" type="datetimeFigureOut">
-              <a:rPr lang="en-US"/>
-              <a:t>30.10.2013</a:t>
+              <a:rPr/>
+              <a:t>01.11.2013</a:t>
             </a:fld>
-            <a:endParaRPr lang="en-US"/>
-          </a:p>
-        </p:txBody>
-      </p:sp>
-      <p:sp>
-        <p:nvSpPr>
-          <p:cNvPr id="1829322476" name="Footer Placeholder 4"/>
+            <a:endParaRPr/>
+          </a:p>
+        </p:txBody>
+      </p:sp>
+      <p:sp>
+        <p:nvSpPr>
+          <p:cNvPr id="518810848" name="Footer Placeholder 4"/>
           <p:cNvSpPr>
             <a:spLocks noGrp="1"/>
           </p:cNvSpPr>
@@ -741,13 +913,13 @@
             <a:pPr>
               <a:defRPr/>
             </a:pPr>
-            <a:endParaRPr lang="en-US"/>
-          </a:p>
-        </p:txBody>
-      </p:sp>
-      <p:sp>
-        <p:nvSpPr>
-          <p:cNvPr id="765920254" name="Slide Number Placeholder 5"/>
+            <a:endParaRPr/>
+          </a:p>
+        </p:txBody>
+      </p:sp>
+      <p:sp>
+        <p:nvSpPr>
+          <p:cNvPr id="435066295" name="Slide Number Placeholder 5"/>
           <p:cNvSpPr>
             <a:spLocks noGrp="1"/>
           </p:cNvSpPr>
@@ -764,10 +936,10 @@
               <a:defRPr/>
             </a:pPr>
             <a:fld id="{08395586-F03A-48D1-94DF-16B239DF4FB5}" type="slidenum">
-              <a:rPr lang="en-US"/>
+              <a:rPr/>
               <a:t>‹#›</a:t>
             </a:fld>
-            <a:endParaRPr lang="en-US"/>
+            <a:endParaRPr/>
           </a:p>
         </p:txBody>
       </p:sp>
@@ -798,7 +970,7 @@
       </p:grpSpPr>
       <p:sp>
         <p:nvSpPr>
-          <p:cNvPr id="1492454274" name="Title 1"/>
+          <p:cNvPr id="977941908" name="Title 1"/>
           <p:cNvSpPr>
             <a:spLocks noGrp="1"/>
           </p:cNvSpPr>
@@ -815,16 +987,16 @@
               <a:defRPr/>
             </a:pPr>
             <a:r>
-              <a:rPr lang="en-US"/>
+              <a:rPr/>
               <a:t>Click to edit Master title style</a:t>
             </a:r>
-            <a:endParaRPr lang="en-US"/>
-          </a:p>
-        </p:txBody>
-      </p:sp>
-      <p:sp>
-        <p:nvSpPr>
-          <p:cNvPr id="86024183" name="Vertical Text Placeholder 2"/>
+            <a:endParaRPr/>
+          </a:p>
+        </p:txBody>
+      </p:sp>
+      <p:sp>
+        <p:nvSpPr>
+          <p:cNvPr id="1958930988" name="Vertical Text Placeholder 2"/>
           <p:cNvSpPr>
             <a:spLocks noGrp="1"/>
           </p:cNvSpPr>
@@ -841,7 +1013,7 @@
               <a:defRPr/>
             </a:pPr>
             <a:r>
-              <a:rPr lang="en-US"/>
+              <a:rPr/>
               <a:t>Click to edit Master text styles</a:t>
             </a:r>
             <a:endParaRPr/>
@@ -851,7 +1023,7 @@
               <a:defRPr/>
             </a:pPr>
             <a:r>
-              <a:rPr lang="en-US"/>
+              <a:rPr/>
               <a:t>Second level</a:t>
             </a:r>
             <a:endParaRPr/>
@@ -861,7 +1033,7 @@
               <a:defRPr/>
             </a:pPr>
             <a:r>
-              <a:rPr lang="en-US"/>
+              <a:rPr/>
               <a:t>Third level</a:t>
             </a:r>
             <a:endParaRPr/>
@@ -871,7 +1043,7 @@
               <a:defRPr/>
             </a:pPr>
             <a:r>
-              <a:rPr lang="en-US"/>
+              <a:rPr/>
               <a:t>Fourth level</a:t>
             </a:r>
             <a:endParaRPr/>
@@ -881,16 +1053,16 @@
               <a:defRPr/>
             </a:pPr>
             <a:r>
-              <a:rPr lang="en-US"/>
+              <a:rPr/>
               <a:t>Fifth level</a:t>
             </a:r>
-            <a:endParaRPr lang="en-US"/>
-          </a:p>
-        </p:txBody>
-      </p:sp>
-      <p:sp>
-        <p:nvSpPr>
-          <p:cNvPr id="1492868391" name="Date Placeholder 3"/>
+            <a:endParaRPr/>
+          </a:p>
+        </p:txBody>
+      </p:sp>
+      <p:sp>
+        <p:nvSpPr>
+          <p:cNvPr id="1222696614" name="Date Placeholder 3"/>
           <p:cNvSpPr>
             <a:spLocks noGrp="1"/>
           </p:cNvSpPr>
@@ -907,16 +1079,16 @@
               <a:defRPr/>
             </a:pPr>
             <a:fld id="{BCC18F51-09EC-435C-A3BA-64A766E099C0}" type="datetimeFigureOut">
-              <a:rPr lang="en-US"/>
-              <a:t>30.10.2013</a:t>
+              <a:rPr/>
+              <a:t>01.11.2013</a:t>
             </a:fld>
-            <a:endParaRPr lang="en-US"/>
-          </a:p>
-        </p:txBody>
-      </p:sp>
-      <p:sp>
-        <p:nvSpPr>
-          <p:cNvPr id="1556872948" name="Footer Placeholder 4"/>
+            <a:endParaRPr/>
+          </a:p>
+        </p:txBody>
+      </p:sp>
+      <p:sp>
+        <p:nvSpPr>
+          <p:cNvPr id="1078756968" name="Footer Placeholder 4"/>
           <p:cNvSpPr>
             <a:spLocks noGrp="1"/>
           </p:cNvSpPr>
@@ -932,13 +1104,13 @@
             <a:pPr>
               <a:defRPr/>
             </a:pPr>
-            <a:endParaRPr lang="en-US"/>
-          </a:p>
-        </p:txBody>
-      </p:sp>
-      <p:sp>
-        <p:nvSpPr>
-          <p:cNvPr id="26135911" name="Slide Number Placeholder 5"/>
+            <a:endParaRPr/>
+          </a:p>
+        </p:txBody>
+      </p:sp>
+      <p:sp>
+        <p:nvSpPr>
+          <p:cNvPr id="1732843627" name="Slide Number Placeholder 5"/>
           <p:cNvSpPr>
             <a:spLocks noGrp="1"/>
           </p:cNvSpPr>
@@ -955,10 +1127,10 @@
               <a:defRPr/>
             </a:pPr>
             <a:fld id="{08395586-F03A-48D1-94DF-16B239DF4FB5}" type="slidenum">
-              <a:rPr lang="en-US"/>
+              <a:rPr/>
               <a:t>‹#›</a:t>
             </a:fld>
-            <a:endParaRPr lang="en-US"/>
+            <a:endParaRPr/>
           </a:p>
         </p:txBody>
       </p:sp>
@@ -989,7 +1161,7 @@
       </p:grpSpPr>
       <p:sp>
         <p:nvSpPr>
-          <p:cNvPr id="1276305772" name="Vertical Title 1"/>
+          <p:cNvPr id="1362437997" name="Vertical Title 1"/>
           <p:cNvSpPr>
             <a:spLocks noGrp="1"/>
           </p:cNvSpPr>
@@ -1011,16 +1183,16 @@
               <a:defRPr/>
             </a:pPr>
             <a:r>
-              <a:rPr lang="en-US"/>
+              <a:rPr/>
               <a:t>Click to edit Master title style</a:t>
             </a:r>
-            <a:endParaRPr lang="en-US"/>
-          </a:p>
-        </p:txBody>
-      </p:sp>
-      <p:sp>
-        <p:nvSpPr>
-          <p:cNvPr id="320384228" name="Vertical Text Placeholder 2"/>
+            <a:endParaRPr/>
+          </a:p>
+        </p:txBody>
+      </p:sp>
+      <p:sp>
+        <p:nvSpPr>
+          <p:cNvPr id="563971459" name="Vertical Text Placeholder 2"/>
           <p:cNvSpPr>
             <a:spLocks noGrp="1"/>
           </p:cNvSpPr>
@@ -1030,8 +1202,8 @@
         </p:nvSpPr>
         <p:spPr bwMode="auto">
           <a:xfrm>
-            <a:off x="838200" y="365125"/>
-            <a:ext cx="7734300" cy="5811838"/>
+            <a:off x="838199" y="365125"/>
+            <a:ext cx="7734299" cy="5811838"/>
           </a:xfrm>
         </p:spPr>
         <p:txBody>
@@ -1042,7 +1214,7 @@
               <a:defRPr/>
             </a:pPr>
             <a:r>
-              <a:rPr lang="en-US"/>
+              <a:rPr/>
               <a:t>Click to edit Master text styles</a:t>
             </a:r>
             <a:endParaRPr/>
@@ -1052,7 +1224,7 @@
               <a:defRPr/>
             </a:pPr>
             <a:r>
-              <a:rPr lang="en-US"/>
+              <a:rPr/>
               <a:t>Second level</a:t>
             </a:r>
             <a:endParaRPr/>
@@ -1062,7 +1234,7 @@
               <a:defRPr/>
             </a:pPr>
             <a:r>
-              <a:rPr lang="en-US"/>
+              <a:rPr/>
               <a:t>Third level</a:t>
             </a:r>
             <a:endParaRPr/>
@@ -1072,7 +1244,7 @@
               <a:defRPr/>
             </a:pPr>
             <a:r>
-              <a:rPr lang="en-US"/>
+              <a:rPr/>
               <a:t>Fourth level</a:t>
             </a:r>
             <a:endParaRPr/>
@@ -1082,16 +1254,16 @@
               <a:defRPr/>
             </a:pPr>
             <a:r>
-              <a:rPr lang="en-US"/>
+              <a:rPr/>
               <a:t>Fifth level</a:t>
             </a:r>
-            <a:endParaRPr lang="en-US"/>
-          </a:p>
-        </p:txBody>
-      </p:sp>
-      <p:sp>
-        <p:nvSpPr>
-          <p:cNvPr id="416356785" name="Date Placeholder 3"/>
+            <a:endParaRPr/>
+          </a:p>
+        </p:txBody>
+      </p:sp>
+      <p:sp>
+        <p:nvSpPr>
+          <p:cNvPr id="1155671327" name="Date Placeholder 3"/>
           <p:cNvSpPr>
             <a:spLocks noGrp="1"/>
           </p:cNvSpPr>
@@ -1108,16 +1280,16 @@
               <a:defRPr/>
             </a:pPr>
             <a:fld id="{BCC18F51-09EC-435C-A3BA-64A766E099C0}" type="datetimeFigureOut">
-              <a:rPr lang="en-US"/>
-              <a:t>30.10.2013</a:t>
+              <a:rPr/>
+              <a:t>01.11.2013</a:t>
             </a:fld>
-            <a:endParaRPr lang="en-US"/>
-          </a:p>
-        </p:txBody>
-      </p:sp>
-      <p:sp>
-        <p:nvSpPr>
-          <p:cNvPr id="1100825137" name="Footer Placeholder 4"/>
+            <a:endParaRPr/>
+          </a:p>
+        </p:txBody>
+      </p:sp>
+      <p:sp>
+        <p:nvSpPr>
+          <p:cNvPr id="768452060" name="Footer Placeholder 4"/>
           <p:cNvSpPr>
             <a:spLocks noGrp="1"/>
           </p:cNvSpPr>
@@ -1133,13 +1305,13 @@
             <a:pPr>
               <a:defRPr/>
             </a:pPr>
-            <a:endParaRPr lang="en-US"/>
-          </a:p>
-        </p:txBody>
-      </p:sp>
-      <p:sp>
-        <p:nvSpPr>
-          <p:cNvPr id="2032418325" name="Slide Number Placeholder 5"/>
+            <a:endParaRPr/>
+          </a:p>
+        </p:txBody>
+      </p:sp>
+      <p:sp>
+        <p:nvSpPr>
+          <p:cNvPr id="969462391" name="Slide Number Placeholder 5"/>
           <p:cNvSpPr>
             <a:spLocks noGrp="1"/>
           </p:cNvSpPr>
@@ -1156,10 +1328,10 @@
               <a:defRPr/>
             </a:pPr>
             <a:fld id="{08395586-F03A-48D1-94DF-16B239DF4FB5}" type="slidenum">
-              <a:rPr lang="en-US"/>
+              <a:rPr/>
               <a:t>‹#›</a:t>
             </a:fld>
-            <a:endParaRPr lang="en-US"/>
+            <a:endParaRPr/>
           </a:p>
         </p:txBody>
       </p:sp>
@@ -1190,7 +1362,7 @@
       </p:grpSpPr>
       <p:sp>
         <p:nvSpPr>
-          <p:cNvPr id="1276409475" name="Title 1"/>
+          <p:cNvPr id="1589639829" name="Title 1"/>
           <p:cNvSpPr>
             <a:spLocks noGrp="1"/>
           </p:cNvSpPr>
@@ -1207,16 +1379,16 @@
               <a:defRPr/>
             </a:pPr>
             <a:r>
-              <a:rPr lang="en-US"/>
+              <a:rPr/>
               <a:t>Click to edit Master title style</a:t>
             </a:r>
-            <a:endParaRPr lang="en-US"/>
-          </a:p>
-        </p:txBody>
-      </p:sp>
-      <p:sp>
-        <p:nvSpPr>
-          <p:cNvPr id="2096922174" name="Content Placeholder 2"/>
+            <a:endParaRPr/>
+          </a:p>
+        </p:txBody>
+      </p:sp>
+      <p:sp>
+        <p:nvSpPr>
+          <p:cNvPr id="1540259449" name="Content Placeholder 2"/>
           <p:cNvSpPr>
             <a:spLocks noGrp="1"/>
           </p:cNvSpPr>
@@ -1233,7 +1405,7 @@
               <a:defRPr/>
             </a:pPr>
             <a:r>
-              <a:rPr lang="en-US"/>
+              <a:rPr/>
               <a:t>Click to edit Master text styles</a:t>
             </a:r>
             <a:endParaRPr/>
@@ -1243,7 +1415,7 @@
               <a:defRPr/>
             </a:pPr>
             <a:r>
-              <a:rPr lang="en-US"/>
+              <a:rPr/>
               <a:t>Second level</a:t>
             </a:r>
             <a:endParaRPr/>
@@ -1253,7 +1425,7 @@
               <a:defRPr/>
             </a:pPr>
             <a:r>
-              <a:rPr lang="en-US"/>
+              <a:rPr/>
               <a:t>Third level</a:t>
             </a:r>
             <a:endParaRPr/>
@@ -1263,7 +1435,7 @@
               <a:defRPr/>
             </a:pPr>
             <a:r>
-              <a:rPr lang="en-US"/>
+              <a:rPr/>
               <a:t>Fourth level</a:t>
             </a:r>
             <a:endParaRPr/>
@@ -1273,16 +1445,16 @@
               <a:defRPr/>
             </a:pPr>
             <a:r>
-              <a:rPr lang="en-US"/>
+              <a:rPr/>
               <a:t>Fifth level</a:t>
             </a:r>
-            <a:endParaRPr lang="en-US"/>
-          </a:p>
-        </p:txBody>
-      </p:sp>
-      <p:sp>
-        <p:nvSpPr>
-          <p:cNvPr id="2100524024" name="Date Placeholder 3"/>
+            <a:endParaRPr/>
+          </a:p>
+        </p:txBody>
+      </p:sp>
+      <p:sp>
+        <p:nvSpPr>
+          <p:cNvPr id="247089192" name="Date Placeholder 3"/>
           <p:cNvSpPr>
             <a:spLocks noGrp="1"/>
           </p:cNvSpPr>
@@ -1299,16 +1471,16 @@
               <a:defRPr/>
             </a:pPr>
             <a:fld id="{BCC18F51-09EC-435C-A3BA-64A766E099C0}" type="datetimeFigureOut">
-              <a:rPr lang="en-US"/>
-              <a:t>30.10.2013</a:t>
+              <a:rPr/>
+              <a:t>01.11.2013</a:t>
             </a:fld>
-            <a:endParaRPr lang="en-US"/>
-          </a:p>
-        </p:txBody>
-      </p:sp>
-      <p:sp>
-        <p:nvSpPr>
-          <p:cNvPr id="1913046690" name="Footer Placeholder 4"/>
+            <a:endParaRPr/>
+          </a:p>
+        </p:txBody>
+      </p:sp>
+      <p:sp>
+        <p:nvSpPr>
+          <p:cNvPr id="1687652325" name="Footer Placeholder 4"/>
           <p:cNvSpPr>
             <a:spLocks noGrp="1"/>
           </p:cNvSpPr>
@@ -1324,13 +1496,13 @@
             <a:pPr>
               <a:defRPr/>
             </a:pPr>
-            <a:endParaRPr lang="en-US"/>
-          </a:p>
-        </p:txBody>
-      </p:sp>
-      <p:sp>
-        <p:nvSpPr>
-          <p:cNvPr id="1393680999" name="Slide Number Placeholder 5"/>
+            <a:endParaRPr/>
+          </a:p>
+        </p:txBody>
+      </p:sp>
+      <p:sp>
+        <p:nvSpPr>
+          <p:cNvPr id="1414905085" name="Slide Number Placeholder 5"/>
           <p:cNvSpPr>
             <a:spLocks noGrp="1"/>
           </p:cNvSpPr>
@@ -1347,10 +1519,10 @@
               <a:defRPr/>
             </a:pPr>
             <a:fld id="{08395586-F03A-48D1-94DF-16B239DF4FB5}" type="slidenum">
-              <a:rPr lang="en-US"/>
+              <a:rPr/>
               <a:t>‹#›</a:t>
             </a:fld>
-            <a:endParaRPr lang="en-US"/>
+            <a:endParaRPr/>
           </a:p>
         </p:txBody>
       </p:sp>
@@ -1381,7 +1553,7 @@
       </p:grpSpPr>
       <p:sp>
         <p:nvSpPr>
-          <p:cNvPr id="1076946979" name="Title 1"/>
+          <p:cNvPr id="295013417" name="Title 1"/>
           <p:cNvSpPr>
             <a:spLocks noGrp="1"/>
           </p:cNvSpPr>
@@ -1399,7 +1571,7 @@
           <a:bodyPr anchor="b"/>
           <a:lstStyle>
             <a:lvl1pPr>
-              <a:defRPr sz="6000"/>
+              <a:defRPr sz="4500"/>
             </a:lvl1pPr>
           </a:lstStyle>
           <a:p>
@@ -1407,16 +1579,16 @@
               <a:defRPr/>
             </a:pPr>
             <a:r>
-              <a:rPr lang="en-US"/>
+              <a:rPr/>
               <a:t>Click to edit Master title style</a:t>
             </a:r>
-            <a:endParaRPr lang="en-US"/>
-          </a:p>
-        </p:txBody>
-      </p:sp>
-      <p:sp>
-        <p:nvSpPr>
-          <p:cNvPr id="456169450" name="Text Placeholder 2"/>
+            <a:endParaRPr/>
+          </a:p>
+        </p:txBody>
+      </p:sp>
+      <p:sp>
+        <p:nvSpPr>
+          <p:cNvPr id="1814362103" name="Text Placeholder 2"/>
           <p:cNvSpPr>
             <a:spLocks noGrp="1"/>
           </p:cNvSpPr>
@@ -1427,7 +1599,7 @@
         <p:spPr bwMode="auto">
           <a:xfrm>
             <a:off x="831850" y="4589463"/>
-            <a:ext cx="10515600" cy="1500187"/>
+            <a:ext cx="10515600" cy="1500186"/>
           </a:xfrm>
         </p:spPr>
         <p:txBody>
@@ -1435,7 +1607,7 @@
           <a:lstStyle>
             <a:lvl1pPr marL="0" indent="0">
               <a:buNone/>
-              <a:defRPr sz="2400">
+              <a:defRPr sz="1800">
                 <a:solidFill>
                   <a:schemeClr val="tx1">
                     <a:tint val="75000"/>
@@ -1443,9 +1615,9 @@
                 </a:solidFill>
               </a:defRPr>
             </a:lvl1pPr>
-            <a:lvl2pPr marL="457200" indent="0">
-              <a:buNone/>
-              <a:defRPr sz="2000">
+            <a:lvl2pPr marL="342900" indent="0">
+              <a:buNone/>
+              <a:defRPr sz="1500">
                 <a:solidFill>
                   <a:schemeClr val="tx1">
                     <a:tint val="75000"/>
@@ -1453,9 +1625,9 @@
                 </a:solidFill>
               </a:defRPr>
             </a:lvl2pPr>
-            <a:lvl3pPr marL="914400" indent="0">
-              <a:buNone/>
-              <a:defRPr sz="1800">
+            <a:lvl3pPr marL="685800" indent="0">
+              <a:buNone/>
+              <a:defRPr sz="1350">
                 <a:solidFill>
                   <a:schemeClr val="tx1">
                     <a:tint val="75000"/>
@@ -1463,9 +1635,9 @@
                 </a:solidFill>
               </a:defRPr>
             </a:lvl3pPr>
-            <a:lvl4pPr marL="1371600" indent="0">
-              <a:buNone/>
-              <a:defRPr sz="1600">
+            <a:lvl4pPr marL="1028700" indent="0">
+              <a:buNone/>
+              <a:defRPr sz="1200">
                 <a:solidFill>
                   <a:schemeClr val="tx1">
                     <a:tint val="75000"/>
@@ -1473,9 +1645,9 @@
                 </a:solidFill>
               </a:defRPr>
             </a:lvl4pPr>
-            <a:lvl5pPr marL="1828800" indent="0">
-              <a:buNone/>
-              <a:defRPr sz="1600">
+            <a:lvl5pPr marL="1371600" indent="0">
+              <a:buNone/>
+              <a:defRPr sz="1200">
                 <a:solidFill>
                   <a:schemeClr val="tx1">
                     <a:tint val="75000"/>
@@ -1483,9 +1655,9 @@
                 </a:solidFill>
               </a:defRPr>
             </a:lvl5pPr>
-            <a:lvl6pPr marL="2286000" indent="0">
-              <a:buNone/>
-              <a:defRPr sz="1600">
+            <a:lvl6pPr marL="1714500" indent="0">
+              <a:buNone/>
+              <a:defRPr sz="1200">
                 <a:solidFill>
                   <a:schemeClr val="tx1">
                     <a:tint val="75000"/>
@@ -1493,9 +1665,9 @@
                 </a:solidFill>
               </a:defRPr>
             </a:lvl6pPr>
-            <a:lvl7pPr marL="2743200" indent="0">
-              <a:buNone/>
-              <a:defRPr sz="1600">
+            <a:lvl7pPr marL="2057400" indent="0">
+              <a:buNone/>
+              <a:defRPr sz="1200">
                 <a:solidFill>
                   <a:schemeClr val="tx1">
                     <a:tint val="75000"/>
@@ -1503,9 +1675,9 @@
                 </a:solidFill>
               </a:defRPr>
             </a:lvl7pPr>
-            <a:lvl8pPr marL="3200400" indent="0">
-              <a:buNone/>
-              <a:defRPr sz="1600">
+            <a:lvl8pPr marL="2400300" indent="0">
+              <a:buNone/>
+              <a:defRPr sz="1200">
                 <a:solidFill>
                   <a:schemeClr val="tx1">
                     <a:tint val="75000"/>
@@ -1513,9 +1685,9 @@
                 </a:solidFill>
               </a:defRPr>
             </a:lvl8pPr>
-            <a:lvl9pPr marL="3657600" indent="0">
-              <a:buNone/>
-              <a:defRPr sz="1600">
+            <a:lvl9pPr marL="2743200" indent="0">
+              <a:buNone/>
+              <a:defRPr sz="1200">
                 <a:solidFill>
                   <a:schemeClr val="tx1">
                     <a:tint val="75000"/>
@@ -1529,7 +1701,7 @@
               <a:defRPr/>
             </a:pPr>
             <a:r>
-              <a:rPr lang="en-US"/>
+              <a:rPr/>
               <a:t>Click to edit Master text styles</a:t>
             </a:r>
             <a:endParaRPr/>
@@ -1538,7 +1710,7 @@
       </p:sp>
       <p:sp>
         <p:nvSpPr>
-          <p:cNvPr id="447238658" name="Date Placeholder 3"/>
+          <p:cNvPr id="2057379401" name="Date Placeholder 3"/>
           <p:cNvSpPr>
             <a:spLocks noGrp="1"/>
           </p:cNvSpPr>
@@ -1555,16 +1727,16 @@
               <a:defRPr/>
             </a:pPr>
             <a:fld id="{BCC18F51-09EC-435C-A3BA-64A766E099C0}" type="datetimeFigureOut">
-              <a:rPr lang="en-US"/>
-              <a:t>30.10.2013</a:t>
+              <a:rPr/>
+              <a:t>01.11.2013</a:t>
             </a:fld>
-            <a:endParaRPr lang="en-US"/>
-          </a:p>
-        </p:txBody>
-      </p:sp>
-      <p:sp>
-        <p:nvSpPr>
-          <p:cNvPr id="2061687286" name="Footer Placeholder 4"/>
+            <a:endParaRPr/>
+          </a:p>
+        </p:txBody>
+      </p:sp>
+      <p:sp>
+        <p:nvSpPr>
+          <p:cNvPr id="485435660" name="Footer Placeholder 4"/>
           <p:cNvSpPr>
             <a:spLocks noGrp="1"/>
           </p:cNvSpPr>
@@ -1580,13 +1752,13 @@
             <a:pPr>
               <a:defRPr/>
             </a:pPr>
-            <a:endParaRPr lang="en-US"/>
-          </a:p>
-        </p:txBody>
-      </p:sp>
-      <p:sp>
-        <p:nvSpPr>
-          <p:cNvPr id="162001168" name="Slide Number Placeholder 5"/>
+            <a:endParaRPr/>
+          </a:p>
+        </p:txBody>
+      </p:sp>
+      <p:sp>
+        <p:nvSpPr>
+          <p:cNvPr id="824363889" name="Slide Number Placeholder 5"/>
           <p:cNvSpPr>
             <a:spLocks noGrp="1"/>
           </p:cNvSpPr>
@@ -1603,10 +1775,10 @@
               <a:defRPr/>
             </a:pPr>
             <a:fld id="{08395586-F03A-48D1-94DF-16B239DF4FB5}" type="slidenum">
-              <a:rPr lang="en-US"/>
+              <a:rPr/>
               <a:t>‹#›</a:t>
             </a:fld>
-            <a:endParaRPr lang="en-US"/>
+            <a:endParaRPr/>
           </a:p>
         </p:txBody>
       </p:sp>
@@ -1637,7 +1809,7 @@
       </p:grpSpPr>
       <p:sp>
         <p:nvSpPr>
-          <p:cNvPr id="206017784" name="Title 1"/>
+          <p:cNvPr id="1628567522" name="Title 1"/>
           <p:cNvSpPr>
             <a:spLocks noGrp="1"/>
           </p:cNvSpPr>
@@ -1654,16 +1826,16 @@
               <a:defRPr/>
             </a:pPr>
             <a:r>
-              <a:rPr lang="en-US"/>
+              <a:rPr/>
               <a:t>Click to edit Master title style</a:t>
             </a:r>
-            <a:endParaRPr lang="en-US"/>
-          </a:p>
-        </p:txBody>
-      </p:sp>
-      <p:sp>
-        <p:nvSpPr>
-          <p:cNvPr id="792587791" name="Content Placeholder 2"/>
+            <a:endParaRPr/>
+          </a:p>
+        </p:txBody>
+      </p:sp>
+      <p:sp>
+        <p:nvSpPr>
+          <p:cNvPr id="161029111" name="Content Placeholder 2"/>
           <p:cNvSpPr>
             <a:spLocks noGrp="1"/>
           </p:cNvSpPr>
@@ -1673,8 +1845,8 @@
         </p:nvSpPr>
         <p:spPr bwMode="auto">
           <a:xfrm>
-            <a:off x="838200" y="1825625"/>
-            <a:ext cx="5181600" cy="4351338"/>
+            <a:off x="838199" y="1825625"/>
+            <a:ext cx="5181599" cy="4351338"/>
           </a:xfrm>
         </p:spPr>
         <p:txBody>
@@ -1685,7 +1857,7 @@
               <a:defRPr/>
             </a:pPr>
             <a:r>
-              <a:rPr lang="en-US"/>
+              <a:rPr/>
               <a:t>Click to edit Master text styles</a:t>
             </a:r>
             <a:endParaRPr/>
@@ -1695,7 +1867,7 @@
               <a:defRPr/>
             </a:pPr>
             <a:r>
-              <a:rPr lang="en-US"/>
+              <a:rPr/>
               <a:t>Second level</a:t>
             </a:r>
             <a:endParaRPr/>
@@ -1705,7 +1877,7 @@
               <a:defRPr/>
             </a:pPr>
             <a:r>
-              <a:rPr lang="en-US"/>
+              <a:rPr/>
               <a:t>Third level</a:t>
             </a:r>
             <a:endParaRPr/>
@@ -1715,7 +1887,7 @@
               <a:defRPr/>
             </a:pPr>
             <a:r>
-              <a:rPr lang="en-US"/>
+              <a:rPr/>
               <a:t>Fourth level</a:t>
             </a:r>
             <a:endParaRPr/>
@@ -1725,16 +1897,16 @@
               <a:defRPr/>
             </a:pPr>
             <a:r>
-              <a:rPr lang="en-US"/>
+              <a:rPr/>
               <a:t>Fifth level</a:t>
             </a:r>
-            <a:endParaRPr lang="en-US"/>
-          </a:p>
-        </p:txBody>
-      </p:sp>
-      <p:sp>
-        <p:nvSpPr>
-          <p:cNvPr id="644413925" name="Content Placeholder 3"/>
+            <a:endParaRPr/>
+          </a:p>
+        </p:txBody>
+      </p:sp>
+      <p:sp>
+        <p:nvSpPr>
+          <p:cNvPr id="244017094" name="Content Placeholder 3"/>
           <p:cNvSpPr>
             <a:spLocks noGrp="1"/>
           </p:cNvSpPr>
@@ -1745,7 +1917,7 @@
         <p:spPr bwMode="auto">
           <a:xfrm>
             <a:off x="6172200" y="1825625"/>
-            <a:ext cx="5181600" cy="4351338"/>
+            <a:ext cx="5181599" cy="4351338"/>
           </a:xfrm>
         </p:spPr>
         <p:txBody>
@@ -1756,7 +1928,7 @@
               <a:defRPr/>
             </a:pPr>
             <a:r>
-              <a:rPr lang="en-US"/>
+              <a:rPr/>
               <a:t>Click to edit Master text styles</a:t>
             </a:r>
             <a:endParaRPr/>
@@ -1766,7 +1938,7 @@
               <a:defRPr/>
             </a:pPr>
             <a:r>
-              <a:rPr lang="en-US"/>
+              <a:rPr/>
               <a:t>Second level</a:t>
             </a:r>
             <a:endParaRPr/>
@@ -1776,7 +1948,7 @@
               <a:defRPr/>
             </a:pPr>
             <a:r>
-              <a:rPr lang="en-US"/>
+              <a:rPr/>
               <a:t>Third level</a:t>
             </a:r>
             <a:endParaRPr/>
@@ -1786,7 +1958,7 @@
               <a:defRPr/>
             </a:pPr>
             <a:r>
-              <a:rPr lang="en-US"/>
+              <a:rPr/>
               <a:t>Fourth level</a:t>
             </a:r>
             <a:endParaRPr/>
@@ -1796,16 +1968,16 @@
               <a:defRPr/>
             </a:pPr>
             <a:r>
-              <a:rPr lang="en-US"/>
+              <a:rPr/>
               <a:t>Fifth level</a:t>
             </a:r>
-            <a:endParaRPr lang="en-US"/>
-          </a:p>
-        </p:txBody>
-      </p:sp>
-      <p:sp>
-        <p:nvSpPr>
-          <p:cNvPr id="9731666" name="Date Placeholder 4"/>
+            <a:endParaRPr/>
+          </a:p>
+        </p:txBody>
+      </p:sp>
+      <p:sp>
+        <p:nvSpPr>
+          <p:cNvPr id="2064406230" name="Date Placeholder 4"/>
           <p:cNvSpPr>
             <a:spLocks noGrp="1"/>
           </p:cNvSpPr>
@@ -1822,16 +1994,16 @@
               <a:defRPr/>
             </a:pPr>
             <a:fld id="{BCC18F51-09EC-435C-A3BA-64A766E099C0}" type="datetimeFigureOut">
-              <a:rPr lang="en-US"/>
-              <a:t>30.10.2013</a:t>
+              <a:rPr/>
+              <a:t>01.11.2013</a:t>
             </a:fld>
-            <a:endParaRPr lang="en-US"/>
-          </a:p>
-        </p:txBody>
-      </p:sp>
-      <p:sp>
-        <p:nvSpPr>
-          <p:cNvPr id="965102139" name="Footer Placeholder 5"/>
+            <a:endParaRPr/>
+          </a:p>
+        </p:txBody>
+      </p:sp>
+      <p:sp>
+        <p:nvSpPr>
+          <p:cNvPr id="77429360" name="Footer Placeholder 5"/>
           <p:cNvSpPr>
             <a:spLocks noGrp="1"/>
           </p:cNvSpPr>
@@ -1847,13 +2019,13 @@
             <a:pPr>
               <a:defRPr/>
             </a:pPr>
-            <a:endParaRPr lang="en-US"/>
-          </a:p>
-        </p:txBody>
-      </p:sp>
-      <p:sp>
-        <p:nvSpPr>
-          <p:cNvPr id="777302708" name="Slide Number Placeholder 6"/>
+            <a:endParaRPr/>
+          </a:p>
+        </p:txBody>
+      </p:sp>
+      <p:sp>
+        <p:nvSpPr>
+          <p:cNvPr id="1873925381" name="Slide Number Placeholder 6"/>
           <p:cNvSpPr>
             <a:spLocks noGrp="1"/>
           </p:cNvSpPr>
@@ -1870,10 +2042,10 @@
               <a:defRPr/>
             </a:pPr>
             <a:fld id="{08395586-F03A-48D1-94DF-16B239DF4FB5}" type="slidenum">
-              <a:rPr lang="en-US"/>
+              <a:rPr/>
               <a:t>‹#›</a:t>
             </a:fld>
-            <a:endParaRPr lang="en-US"/>
+            <a:endParaRPr/>
           </a:p>
         </p:txBody>
       </p:sp>
@@ -1904,7 +2076,7 @@
       </p:grpSpPr>
       <p:sp>
         <p:nvSpPr>
-          <p:cNvPr id="328572732" name="Title 1"/>
+          <p:cNvPr id="629203295" name="Title 1"/>
           <p:cNvSpPr>
             <a:spLocks noGrp="1"/>
           </p:cNvSpPr>
@@ -1914,8 +2086,8 @@
         </p:nvSpPr>
         <p:spPr bwMode="auto">
           <a:xfrm>
-            <a:off x="839788" y="365125"/>
-            <a:ext cx="10515600" cy="1325563"/>
+            <a:off x="839787" y="365125"/>
+            <a:ext cx="10515600" cy="1325562"/>
           </a:xfrm>
         </p:spPr>
         <p:txBody>
@@ -1926,16 +2098,16 @@
               <a:defRPr/>
             </a:pPr>
             <a:r>
-              <a:rPr lang="en-US"/>
+              <a:rPr/>
               <a:t>Click to edit Master title style</a:t>
             </a:r>
-            <a:endParaRPr lang="en-US"/>
-          </a:p>
-        </p:txBody>
-      </p:sp>
-      <p:sp>
-        <p:nvSpPr>
-          <p:cNvPr id="1971445656" name="Text Placeholder 2"/>
+            <a:endParaRPr/>
+          </a:p>
+        </p:txBody>
+      </p:sp>
+      <p:sp>
+        <p:nvSpPr>
+          <p:cNvPr id="1418473530" name="Text Placeholder 2"/>
           <p:cNvSpPr>
             <a:spLocks noGrp="1"/>
           </p:cNvSpPr>
@@ -1945,8 +2117,8 @@
         </p:nvSpPr>
         <p:spPr bwMode="auto">
           <a:xfrm>
-            <a:off x="839788" y="1681163"/>
-            <a:ext cx="5157787" cy="823912"/>
+            <a:off x="839789" y="1681162"/>
+            <a:ext cx="5157786" cy="823911"/>
           </a:xfrm>
         </p:spPr>
         <p:txBody>
@@ -1954,39 +2126,39 @@
           <a:lstStyle>
             <a:lvl1pPr marL="0" indent="0">
               <a:buNone/>
-              <a:defRPr sz="2400" b="1"/>
+              <a:defRPr sz="1800" b="1"/>
             </a:lvl1pPr>
-            <a:lvl2pPr marL="457200" indent="0">
-              <a:buNone/>
-              <a:defRPr sz="2000" b="1"/>
+            <a:lvl2pPr marL="342900" indent="0">
+              <a:buNone/>
+              <a:defRPr sz="1500" b="1"/>
             </a:lvl2pPr>
-            <a:lvl3pPr marL="914400" indent="0">
-              <a:buNone/>
-              <a:defRPr sz="1800" b="1"/>
+            <a:lvl3pPr marL="685800" indent="0">
+              <a:buNone/>
+              <a:defRPr sz="1350" b="1"/>
             </a:lvl3pPr>
-            <a:lvl4pPr marL="1371600" indent="0">
-              <a:buNone/>
-              <a:defRPr sz="1600" b="1"/>
+            <a:lvl4pPr marL="1028700" indent="0">
+              <a:buNone/>
+              <a:defRPr sz="1200" b="1"/>
             </a:lvl4pPr>
-            <a:lvl5pPr marL="1828800" indent="0">
-              <a:buNone/>
-              <a:defRPr sz="1600" b="1"/>
+            <a:lvl5pPr marL="1371600" indent="0">
+              <a:buNone/>
+              <a:defRPr sz="1200" b="1"/>
             </a:lvl5pPr>
-            <a:lvl6pPr marL="2286000" indent="0">
-              <a:buNone/>
-              <a:defRPr sz="1600" b="1"/>
+            <a:lvl6pPr marL="1714500" indent="0">
+              <a:buNone/>
+              <a:defRPr sz="1200" b="1"/>
             </a:lvl6pPr>
-            <a:lvl7pPr marL="2743200" indent="0">
-              <a:buNone/>
-              <a:defRPr sz="1600" b="1"/>
+            <a:lvl7pPr marL="2057400" indent="0">
+              <a:buNone/>
+              <a:defRPr sz="1200" b="1"/>
             </a:lvl7pPr>
-            <a:lvl8pPr marL="3200400" indent="0">
-              <a:buNone/>
-              <a:defRPr sz="1600" b="1"/>
+            <a:lvl8pPr marL="2400300" indent="0">
+              <a:buNone/>
+              <a:defRPr sz="1200" b="1"/>
             </a:lvl8pPr>
-            <a:lvl9pPr marL="3657600" indent="0">
-              <a:buNone/>
-              <a:defRPr sz="1600" b="1"/>
+            <a:lvl9pPr marL="2743200" indent="0">
+              <a:buNone/>
+              <a:defRPr sz="1200" b="1"/>
             </a:lvl9pPr>
           </a:lstStyle>
           <a:p>
@@ -1994,7 +2166,7 @@
               <a:defRPr/>
             </a:pPr>
             <a:r>
-              <a:rPr lang="en-US"/>
+              <a:rPr/>
               <a:t>Click to edit Master text styles</a:t>
             </a:r>
             <a:endParaRPr/>
@@ -2003,7 +2175,7 @@
       </p:sp>
       <p:sp>
         <p:nvSpPr>
-          <p:cNvPr id="503002876" name="Content Placeholder 3"/>
+          <p:cNvPr id="1786035816" name="Content Placeholder 3"/>
           <p:cNvSpPr>
             <a:spLocks noGrp="1"/>
           </p:cNvSpPr>
@@ -2013,8 +2185,8 @@
         </p:nvSpPr>
         <p:spPr bwMode="auto">
           <a:xfrm>
-            <a:off x="839788" y="2505074"/>
-            <a:ext cx="5157787" cy="3684588"/>
+            <a:off x="839789" y="2505074"/>
+            <a:ext cx="5157786" cy="3684587"/>
           </a:xfrm>
         </p:spPr>
         <p:txBody>
@@ -2025,7 +2197,7 @@
               <a:defRPr/>
             </a:pPr>
             <a:r>
-              <a:rPr lang="en-US"/>
+              <a:rPr/>
               <a:t>Click to edit Master text styles</a:t>
             </a:r>
             <a:endParaRPr/>
@@ -2035,7 +2207,7 @@
               <a:defRPr/>
             </a:pPr>
             <a:r>
-              <a:rPr lang="en-US"/>
+              <a:rPr/>
               <a:t>Second level</a:t>
             </a:r>
             <a:endParaRPr/>
@@ -2045,7 +2217,7 @@
               <a:defRPr/>
             </a:pPr>
             <a:r>
-              <a:rPr lang="en-US"/>
+              <a:rPr/>
               <a:t>Third level</a:t>
             </a:r>
             <a:endParaRPr/>
@@ -2055,7 +2227,7 @@
               <a:defRPr/>
             </a:pPr>
             <a:r>
-              <a:rPr lang="en-US"/>
+              <a:rPr/>
               <a:t>Fourth level</a:t>
             </a:r>
             <a:endParaRPr/>
@@ -2065,16 +2237,16 @@
               <a:defRPr/>
             </a:pPr>
             <a:r>
-              <a:rPr lang="en-US"/>
+              <a:rPr/>
               <a:t>Fifth level</a:t>
             </a:r>
-            <a:endParaRPr lang="en-US"/>
-          </a:p>
-        </p:txBody>
-      </p:sp>
-      <p:sp>
-        <p:nvSpPr>
-          <p:cNvPr id="1726469691" name="Text Placeholder 4"/>
+            <a:endParaRPr/>
+          </a:p>
+        </p:txBody>
+      </p:sp>
+      <p:sp>
+        <p:nvSpPr>
+          <p:cNvPr id="432813386" name="Text Placeholder 4"/>
           <p:cNvSpPr>
             <a:spLocks noGrp="1"/>
           </p:cNvSpPr>
@@ -2084,8 +2256,8 @@
         </p:nvSpPr>
         <p:spPr bwMode="auto">
           <a:xfrm>
-            <a:off x="6172200" y="1681163"/>
-            <a:ext cx="5183188" cy="823912"/>
+            <a:off x="6172200" y="1681162"/>
+            <a:ext cx="5183187" cy="823911"/>
           </a:xfrm>
         </p:spPr>
         <p:txBody>
@@ -2093,39 +2265,39 @@
           <a:lstStyle>
             <a:lvl1pPr marL="0" indent="0">
               <a:buNone/>
-              <a:defRPr sz="2400" b="1"/>
+              <a:defRPr sz="1800" b="1"/>
             </a:lvl1pPr>
-            <a:lvl2pPr marL="457200" indent="0">
-              <a:buNone/>
-              <a:defRPr sz="2000" b="1"/>
+            <a:lvl2pPr marL="342900" indent="0">
+              <a:buNone/>
+              <a:defRPr sz="1500" b="1"/>
             </a:lvl2pPr>
-            <a:lvl3pPr marL="914400" indent="0">
-              <a:buNone/>
-              <a:defRPr sz="1800" b="1"/>
+            <a:lvl3pPr marL="685800" indent="0">
+              <a:buNone/>
+              <a:defRPr sz="1350" b="1"/>
             </a:lvl3pPr>
-            <a:lvl4pPr marL="1371600" indent="0">
-              <a:buNone/>
-              <a:defRPr sz="1600" b="1"/>
+            <a:lvl4pPr marL="1028700" indent="0">
+              <a:buNone/>
+              <a:defRPr sz="1200" b="1"/>
             </a:lvl4pPr>
-            <a:lvl5pPr marL="1828800" indent="0">
-              <a:buNone/>
-              <a:defRPr sz="1600" b="1"/>
+            <a:lvl5pPr marL="1371600" indent="0">
+              <a:buNone/>
+              <a:defRPr sz="1200" b="1"/>
             </a:lvl5pPr>
-            <a:lvl6pPr marL="2286000" indent="0">
-              <a:buNone/>
-              <a:defRPr sz="1600" b="1"/>
+            <a:lvl6pPr marL="1714500" indent="0">
+              <a:buNone/>
+              <a:defRPr sz="1200" b="1"/>
             </a:lvl6pPr>
-            <a:lvl7pPr marL="2743200" indent="0">
-              <a:buNone/>
-              <a:defRPr sz="1600" b="1"/>
+            <a:lvl7pPr marL="2057400" indent="0">
+              <a:buNone/>
+              <a:defRPr sz="1200" b="1"/>
             </a:lvl7pPr>
-            <a:lvl8pPr marL="3200400" indent="0">
-              <a:buNone/>
-              <a:defRPr sz="1600" b="1"/>
+            <a:lvl8pPr marL="2400300" indent="0">
+              <a:buNone/>
+              <a:defRPr sz="1200" b="1"/>
             </a:lvl8pPr>
-            <a:lvl9pPr marL="3657600" indent="0">
-              <a:buNone/>
-              <a:defRPr sz="1600" b="1"/>
+            <a:lvl9pPr marL="2743200" indent="0">
+              <a:buNone/>
+              <a:defRPr sz="1200" b="1"/>
             </a:lvl9pPr>
           </a:lstStyle>
           <a:p>
@@ -2133,7 +2305,7 @@
               <a:defRPr/>
             </a:pPr>
             <a:r>
-              <a:rPr lang="en-US"/>
+              <a:rPr/>
               <a:t>Click to edit Master text styles</a:t>
             </a:r>
             <a:endParaRPr/>
@@ -2142,7 +2314,7 @@
       </p:sp>
       <p:sp>
         <p:nvSpPr>
-          <p:cNvPr id="1193403080" name="Content Placeholder 5"/>
+          <p:cNvPr id="1119107597" name="Content Placeholder 5"/>
           <p:cNvSpPr>
             <a:spLocks noGrp="1"/>
           </p:cNvSpPr>
@@ -2153,7 +2325,7 @@
         <p:spPr bwMode="auto">
           <a:xfrm>
             <a:off x="6172200" y="2505074"/>
-            <a:ext cx="5183188" cy="3684588"/>
+            <a:ext cx="5183187" cy="3684587"/>
           </a:xfrm>
         </p:spPr>
         <p:txBody>
@@ -2164,7 +2336,7 @@
               <a:defRPr/>
             </a:pPr>
             <a:r>
-              <a:rPr lang="en-US"/>
+              <a:rPr/>
               <a:t>Click to edit Master text styles</a:t>
             </a:r>
             <a:endParaRPr/>
@@ -2174,7 +2346,7 @@
               <a:defRPr/>
             </a:pPr>
             <a:r>
-              <a:rPr lang="en-US"/>
+              <a:rPr/>
               <a:t>Second level</a:t>
             </a:r>
             <a:endParaRPr/>
@@ -2184,7 +2356,7 @@
               <a:defRPr/>
             </a:pPr>
             <a:r>
-              <a:rPr lang="en-US"/>
+              <a:rPr/>
               <a:t>Third level</a:t>
             </a:r>
             <a:endParaRPr/>
@@ -2194,7 +2366,7 @@
               <a:defRPr/>
             </a:pPr>
             <a:r>
-              <a:rPr lang="en-US"/>
+              <a:rPr/>
               <a:t>Fourth level</a:t>
             </a:r>
             <a:endParaRPr/>
@@ -2204,16 +2376,16 @@
               <a:defRPr/>
             </a:pPr>
             <a:r>
-              <a:rPr lang="en-US"/>
+              <a:rPr/>
               <a:t>Fifth level</a:t>
             </a:r>
-            <a:endParaRPr lang="en-US"/>
-          </a:p>
-        </p:txBody>
-      </p:sp>
-      <p:sp>
-        <p:nvSpPr>
-          <p:cNvPr id="2034141762" name="Date Placeholder 6"/>
+            <a:endParaRPr/>
+          </a:p>
+        </p:txBody>
+      </p:sp>
+      <p:sp>
+        <p:nvSpPr>
+          <p:cNvPr id="356568488" name="Date Placeholder 6"/>
           <p:cNvSpPr>
             <a:spLocks noGrp="1"/>
           </p:cNvSpPr>
@@ -2230,16 +2402,16 @@
               <a:defRPr/>
             </a:pPr>
             <a:fld id="{BCC18F51-09EC-435C-A3BA-64A766E099C0}" type="datetimeFigureOut">
-              <a:rPr lang="en-US"/>
-              <a:t>30.10.2013</a:t>
+              <a:rPr/>
+              <a:t>01.11.2013</a:t>
             </a:fld>
-            <a:endParaRPr lang="en-US"/>
-          </a:p>
-        </p:txBody>
-      </p:sp>
-      <p:sp>
-        <p:nvSpPr>
-          <p:cNvPr id="1507045229" name="Footer Placeholder 7"/>
+            <a:endParaRPr/>
+          </a:p>
+        </p:txBody>
+      </p:sp>
+      <p:sp>
+        <p:nvSpPr>
+          <p:cNvPr id="1363874288" name="Footer Placeholder 7"/>
           <p:cNvSpPr>
             <a:spLocks noGrp="1"/>
           </p:cNvSpPr>
@@ -2255,13 +2427,13 @@
             <a:pPr>
               <a:defRPr/>
             </a:pPr>
-            <a:endParaRPr lang="en-US"/>
-          </a:p>
-        </p:txBody>
-      </p:sp>
-      <p:sp>
-        <p:nvSpPr>
-          <p:cNvPr id="584096779" name="Slide Number Placeholder 8"/>
+            <a:endParaRPr/>
+          </a:p>
+        </p:txBody>
+      </p:sp>
+      <p:sp>
+        <p:nvSpPr>
+          <p:cNvPr id="376769698" name="Slide Number Placeholder 8"/>
           <p:cNvSpPr>
             <a:spLocks noGrp="1"/>
           </p:cNvSpPr>
@@ -2278,10 +2450,10 @@
               <a:defRPr/>
             </a:pPr>
             <a:fld id="{08395586-F03A-48D1-94DF-16B239DF4FB5}" type="slidenum">
-              <a:rPr lang="en-US"/>
+              <a:rPr/>
               <a:t>‹#›</a:t>
             </a:fld>
-            <a:endParaRPr lang="en-US"/>
+            <a:endParaRPr/>
           </a:p>
         </p:txBody>
       </p:sp>
@@ -2312,7 +2484,7 @@
       </p:grpSpPr>
       <p:sp>
         <p:nvSpPr>
-          <p:cNvPr id="550725939" name="Title 1"/>
+          <p:cNvPr id="1393723679" name="Title 1"/>
           <p:cNvSpPr>
             <a:spLocks noGrp="1"/>
           </p:cNvSpPr>
@@ -2329,16 +2501,16 @@
               <a:defRPr/>
             </a:pPr>
             <a:r>
-              <a:rPr lang="en-US"/>
+              <a:rPr/>
               <a:t>Click to edit Master title style</a:t>
             </a:r>
-            <a:endParaRPr lang="en-US"/>
-          </a:p>
-        </p:txBody>
-      </p:sp>
-      <p:sp>
-        <p:nvSpPr>
-          <p:cNvPr id="1967606516" name="Date Placeholder 2"/>
+            <a:endParaRPr/>
+          </a:p>
+        </p:txBody>
+      </p:sp>
+      <p:sp>
+        <p:nvSpPr>
+          <p:cNvPr id="1756263434" name="Date Placeholder 2"/>
           <p:cNvSpPr>
             <a:spLocks noGrp="1"/>
           </p:cNvSpPr>
@@ -2355,16 +2527,16 @@
               <a:defRPr/>
             </a:pPr>
             <a:fld id="{BCC18F51-09EC-435C-A3BA-64A766E099C0}" type="datetimeFigureOut">
-              <a:rPr lang="en-US"/>
-              <a:t>30.10.2013</a:t>
+              <a:rPr/>
+              <a:t>01.11.2013</a:t>
             </a:fld>
-            <a:endParaRPr lang="en-US"/>
-          </a:p>
-        </p:txBody>
-      </p:sp>
-      <p:sp>
-        <p:nvSpPr>
-          <p:cNvPr id="1397807219" name="Footer Placeholder 3"/>
+            <a:endParaRPr/>
+          </a:p>
+        </p:txBody>
+      </p:sp>
+      <p:sp>
+        <p:nvSpPr>
+          <p:cNvPr id="964964884" name="Footer Placeholder 3"/>
           <p:cNvSpPr>
             <a:spLocks noGrp="1"/>
           </p:cNvSpPr>
@@ -2380,13 +2552,13 @@
             <a:pPr>
               <a:defRPr/>
             </a:pPr>
-            <a:endParaRPr lang="en-US"/>
-          </a:p>
-        </p:txBody>
-      </p:sp>
-      <p:sp>
-        <p:nvSpPr>
-          <p:cNvPr id="1328827716" name="Slide Number Placeholder 4"/>
+            <a:endParaRPr/>
+          </a:p>
+        </p:txBody>
+      </p:sp>
+      <p:sp>
+        <p:nvSpPr>
+          <p:cNvPr id="538758927" name="Slide Number Placeholder 4"/>
           <p:cNvSpPr>
             <a:spLocks noGrp="1"/>
           </p:cNvSpPr>
@@ -2403,10 +2575,10 @@
               <a:defRPr/>
             </a:pPr>
             <a:fld id="{08395586-F03A-48D1-94DF-16B239DF4FB5}" type="slidenum">
-              <a:rPr lang="en-US"/>
+              <a:rPr/>
               <a:t>‹#›</a:t>
             </a:fld>
-            <a:endParaRPr lang="en-US"/>
+            <a:endParaRPr/>
           </a:p>
         </p:txBody>
       </p:sp>
@@ -2437,7 +2609,7 @@
       </p:grpSpPr>
       <p:sp>
         <p:nvSpPr>
-          <p:cNvPr id="937536184" name="Date Placeholder 1"/>
+          <p:cNvPr id="1762962784" name="Date Placeholder 1"/>
           <p:cNvSpPr>
             <a:spLocks noGrp="1"/>
           </p:cNvSpPr>
@@ -2454,16 +2626,16 @@
               <a:defRPr/>
             </a:pPr>
             <a:fld id="{BCC18F51-09EC-435C-A3BA-64A766E099C0}" type="datetimeFigureOut">
-              <a:rPr lang="en-US"/>
-              <a:t>30.10.2013</a:t>
+              <a:rPr/>
+              <a:t>01.11.2013</a:t>
             </a:fld>
-            <a:endParaRPr lang="en-US"/>
-          </a:p>
-        </p:txBody>
-      </p:sp>
-      <p:sp>
-        <p:nvSpPr>
-          <p:cNvPr id="1489880501" name="Footer Placeholder 2"/>
+            <a:endParaRPr/>
+          </a:p>
+        </p:txBody>
+      </p:sp>
+      <p:sp>
+        <p:nvSpPr>
+          <p:cNvPr id="223510123" name="Footer Placeholder 2"/>
           <p:cNvSpPr>
             <a:spLocks noGrp="1"/>
           </p:cNvSpPr>
@@ -2479,13 +2651,13 @@
             <a:pPr>
               <a:defRPr/>
             </a:pPr>
-            <a:endParaRPr lang="en-US"/>
-          </a:p>
-        </p:txBody>
-      </p:sp>
-      <p:sp>
-        <p:nvSpPr>
-          <p:cNvPr id="905366071" name="Slide Number Placeholder 3"/>
+            <a:endParaRPr/>
+          </a:p>
+        </p:txBody>
+      </p:sp>
+      <p:sp>
+        <p:nvSpPr>
+          <p:cNvPr id="92509111" name="Slide Number Placeholder 3"/>
           <p:cNvSpPr>
             <a:spLocks noGrp="1"/>
           </p:cNvSpPr>
@@ -2502,10 +2674,10 @@
               <a:defRPr/>
             </a:pPr>
             <a:fld id="{08395586-F03A-48D1-94DF-16B239DF4FB5}" type="slidenum">
-              <a:rPr lang="en-US"/>
+              <a:rPr/>
               <a:t>‹#›</a:t>
             </a:fld>
-            <a:endParaRPr lang="en-US"/>
+            <a:endParaRPr/>
           </a:p>
         </p:txBody>
       </p:sp>
@@ -2536,7 +2708,7 @@
       </p:grpSpPr>
       <p:sp>
         <p:nvSpPr>
-          <p:cNvPr id="495955407" name="Title 1"/>
+          <p:cNvPr id="2119556591" name="Title 1"/>
           <p:cNvSpPr>
             <a:spLocks noGrp="1"/>
           </p:cNvSpPr>
@@ -2546,7 +2718,7 @@
         </p:nvSpPr>
         <p:spPr bwMode="auto">
           <a:xfrm>
-            <a:off x="839788" y="457200"/>
+            <a:off x="839787" y="457200"/>
             <a:ext cx="3932237" cy="1600200"/>
           </a:xfrm>
         </p:spPr>
@@ -2554,7 +2726,7 @@
           <a:bodyPr anchor="b"/>
           <a:lstStyle>
             <a:lvl1pPr>
-              <a:defRPr sz="3200"/>
+              <a:defRPr sz="2400"/>
             </a:lvl1pPr>
           </a:lstStyle>
           <a:p>
@@ -2562,16 +2734,16 @@
               <a:defRPr/>
             </a:pPr>
             <a:r>
-              <a:rPr lang="en-US"/>
+              <a:rPr/>
               <a:t>Click to edit Master title style</a:t>
             </a:r>
-            <a:endParaRPr lang="en-US"/>
-          </a:p>
-        </p:txBody>
-      </p:sp>
-      <p:sp>
-        <p:nvSpPr>
-          <p:cNvPr id="1795946850" name="Content Placeholder 2"/>
+            <a:endParaRPr/>
+          </a:p>
+        </p:txBody>
+      </p:sp>
+      <p:sp>
+        <p:nvSpPr>
+          <p:cNvPr id="463186650" name="Content Placeholder 2"/>
           <p:cNvSpPr>
             <a:spLocks noGrp="1"/>
           </p:cNvSpPr>
@@ -2581,7 +2753,7 @@
         </p:nvSpPr>
         <p:spPr bwMode="auto">
           <a:xfrm>
-            <a:off x="5183188" y="987425"/>
+            <a:off x="5183187" y="987425"/>
             <a:ext cx="6172200" cy="4873625"/>
           </a:xfrm>
         </p:spPr>
@@ -2589,31 +2761,31 @@
           <a:bodyPr/>
           <a:lstStyle>
             <a:lvl1pPr>
-              <a:defRPr sz="3200"/>
+              <a:defRPr sz="2400"/>
             </a:lvl1pPr>
             <a:lvl2pPr>
-              <a:defRPr sz="2800"/>
+              <a:defRPr sz="2100"/>
             </a:lvl2pPr>
             <a:lvl3pPr>
-              <a:defRPr sz="2400"/>
+              <a:defRPr sz="1800"/>
             </a:lvl3pPr>
             <a:lvl4pPr>
-              <a:defRPr sz="2000"/>
+              <a:defRPr sz="1500"/>
             </a:lvl4pPr>
             <a:lvl5pPr>
-              <a:defRPr sz="2000"/>
+              <a:defRPr sz="1500"/>
             </a:lvl5pPr>
             <a:lvl6pPr>
-              <a:defRPr sz="2000"/>
+              <a:defRPr sz="1500"/>
             </a:lvl6pPr>
             <a:lvl7pPr>
-              <a:defRPr sz="2000"/>
+              <a:defRPr sz="1500"/>
             </a:lvl7pPr>
             <a:lvl8pPr>
-              <a:defRPr sz="2000"/>
+              <a:defRPr sz="1500"/>
             </a:lvl8pPr>
             <a:lvl9pPr>
-              <a:defRPr sz="2000"/>
+              <a:defRPr sz="1500"/>
             </a:lvl9pPr>
           </a:lstStyle>
           <a:p>
@@ -2621,7 +2793,7 @@
               <a:defRPr/>
             </a:pPr>
             <a:r>
-              <a:rPr lang="en-US"/>
+              <a:rPr/>
               <a:t>Click to edit Master text styles</a:t>
             </a:r>
             <a:endParaRPr/>
@@ -2631,7 +2803,7 @@
               <a:defRPr/>
             </a:pPr>
             <a:r>
-              <a:rPr lang="en-US"/>
+              <a:rPr/>
               <a:t>Second level</a:t>
             </a:r>
             <a:endParaRPr/>
@@ -2641,7 +2813,7 @@
               <a:defRPr/>
             </a:pPr>
             <a:r>
-              <a:rPr lang="en-US"/>
+              <a:rPr/>
               <a:t>Third level</a:t>
             </a:r>
             <a:endParaRPr/>
@@ -2651,7 +2823,7 @@
               <a:defRPr/>
             </a:pPr>
             <a:r>
-              <a:rPr lang="en-US"/>
+              <a:rPr/>
               <a:t>Fourth level</a:t>
             </a:r>
             <a:endParaRPr/>
@@ -2661,16 +2833,16 @@
               <a:defRPr/>
             </a:pPr>
             <a:r>
-              <a:rPr lang="en-US"/>
+              <a:rPr/>
               <a:t>Fifth level</a:t>
             </a:r>
-            <a:endParaRPr lang="en-US"/>
-          </a:p>
-        </p:txBody>
-      </p:sp>
-      <p:sp>
-        <p:nvSpPr>
-          <p:cNvPr id="115025135" name="Text Placeholder 3"/>
+            <a:endParaRPr/>
+          </a:p>
+        </p:txBody>
+      </p:sp>
+      <p:sp>
+        <p:nvSpPr>
+          <p:cNvPr id="143951091" name="Text Placeholder 3"/>
           <p:cNvSpPr>
             <a:spLocks noGrp="1"/>
           </p:cNvSpPr>
@@ -2680,8 +2852,8 @@
         </p:nvSpPr>
         <p:spPr bwMode="auto">
           <a:xfrm>
-            <a:off x="839788" y="2057400"/>
-            <a:ext cx="3932237" cy="3811588"/>
+            <a:off x="839787" y="2057399"/>
+            <a:ext cx="3932237" cy="3811587"/>
           </a:xfrm>
         </p:spPr>
         <p:txBody>
@@ -2689,39 +2861,39 @@
           <a:lstStyle>
             <a:lvl1pPr marL="0" indent="0">
               <a:buNone/>
-              <a:defRPr sz="1600"/>
+              <a:defRPr sz="1200"/>
             </a:lvl1pPr>
-            <a:lvl2pPr marL="457200" indent="0">
-              <a:buNone/>
-              <a:defRPr sz="1400"/>
+            <a:lvl2pPr marL="342900" indent="0">
+              <a:buNone/>
+              <a:defRPr sz="1050"/>
             </a:lvl2pPr>
-            <a:lvl3pPr marL="914400" indent="0">
-              <a:buNone/>
-              <a:defRPr sz="1200"/>
+            <a:lvl3pPr marL="685800" indent="0">
+              <a:buNone/>
+              <a:defRPr sz="900"/>
             </a:lvl3pPr>
-            <a:lvl4pPr marL="1371600" indent="0">
-              <a:buNone/>
-              <a:defRPr sz="1000"/>
+            <a:lvl4pPr marL="1028700" indent="0">
+              <a:buNone/>
+              <a:defRPr sz="750"/>
             </a:lvl4pPr>
-            <a:lvl5pPr marL="1828800" indent="0">
-              <a:buNone/>
-              <a:defRPr sz="1000"/>
+            <a:lvl5pPr marL="1371600" indent="0">
+              <a:buNone/>
+              <a:defRPr sz="750"/>
             </a:lvl5pPr>
-            <a:lvl6pPr marL="2286000" indent="0">
-              <a:buNone/>
-              <a:defRPr sz="1000"/>
+            <a:lvl6pPr marL="1714500" indent="0">
+              <a:buNone/>
+              <a:defRPr sz="750"/>
             </a:lvl6pPr>
-            <a:lvl7pPr marL="2743200" indent="0">
-              <a:buNone/>
-              <a:defRPr sz="1000"/>
+            <a:lvl7pPr marL="2057400" indent="0">
+              <a:buNone/>
+              <a:defRPr sz="750"/>
             </a:lvl7pPr>
-            <a:lvl8pPr marL="3200400" indent="0">
-              <a:buNone/>
-              <a:defRPr sz="1000"/>
+            <a:lvl8pPr marL="2400300" indent="0">
+              <a:buNone/>
+              <a:defRPr sz="750"/>
             </a:lvl8pPr>
-            <a:lvl9pPr marL="3657600" indent="0">
-              <a:buNone/>
-              <a:defRPr sz="1000"/>
+            <a:lvl9pPr marL="2743200" indent="0">
+              <a:buNone/>
+              <a:defRPr sz="750"/>
             </a:lvl9pPr>
           </a:lstStyle>
           <a:p>
@@ -2729,7 +2901,7 @@
               <a:defRPr/>
             </a:pPr>
             <a:r>
-              <a:rPr lang="en-US"/>
+              <a:rPr/>
               <a:t>Click to edit Master text styles</a:t>
             </a:r>
             <a:endParaRPr/>
@@ -2738,7 +2910,7 @@
       </p:sp>
       <p:sp>
         <p:nvSpPr>
-          <p:cNvPr id="949411160" name="Date Placeholder 4"/>
+          <p:cNvPr id="526511912" name="Date Placeholder 4"/>
           <p:cNvSpPr>
             <a:spLocks noGrp="1"/>
           </p:cNvSpPr>
@@ -2755,16 +2927,16 @@
               <a:defRPr/>
             </a:pPr>
             <a:fld id="{BCC18F51-09EC-435C-A3BA-64A766E099C0}" type="datetimeFigureOut">
-              <a:rPr lang="en-US"/>
-              <a:t>30.10.2013</a:t>
+              <a:rPr/>
+              <a:t>01.11.2013</a:t>
             </a:fld>
-            <a:endParaRPr lang="en-US"/>
-          </a:p>
-        </p:txBody>
-      </p:sp>
-      <p:sp>
-        <p:nvSpPr>
-          <p:cNvPr id="1384486647" name="Footer Placeholder 5"/>
+            <a:endParaRPr/>
+          </a:p>
+        </p:txBody>
+      </p:sp>
+      <p:sp>
+        <p:nvSpPr>
+          <p:cNvPr id="2144773733" name="Footer Placeholder 5"/>
           <p:cNvSpPr>
             <a:spLocks noGrp="1"/>
           </p:cNvSpPr>
@@ -2780,13 +2952,13 @@
             <a:pPr>
               <a:defRPr/>
             </a:pPr>
-            <a:endParaRPr lang="en-US"/>
-          </a:p>
-        </p:txBody>
-      </p:sp>
-      <p:sp>
-        <p:nvSpPr>
-          <p:cNvPr id="1301123784" name="Slide Number Placeholder 6"/>
+            <a:endParaRPr/>
+          </a:p>
+        </p:txBody>
+      </p:sp>
+      <p:sp>
+        <p:nvSpPr>
+          <p:cNvPr id="1812285096" name="Slide Number Placeholder 6"/>
           <p:cNvSpPr>
             <a:spLocks noGrp="1"/>
           </p:cNvSpPr>
@@ -2803,10 +2975,10 @@
               <a:defRPr/>
             </a:pPr>
             <a:fld id="{08395586-F03A-48D1-94DF-16B239DF4FB5}" type="slidenum">
-              <a:rPr lang="en-US"/>
+              <a:rPr/>
               <a:t>‹#›</a:t>
             </a:fld>
-            <a:endParaRPr lang="en-US"/>
+            <a:endParaRPr/>
           </a:p>
         </p:txBody>
       </p:sp>
@@ -2837,7 +3009,7 @@
       </p:grpSpPr>
       <p:sp>
         <p:nvSpPr>
-          <p:cNvPr id="13529328" name="Title 1"/>
+          <p:cNvPr id="2004877704" name="Title 1"/>
           <p:cNvSpPr>
             <a:spLocks noGrp="1"/>
           </p:cNvSpPr>
@@ -2847,7 +3019,7 @@
         </p:nvSpPr>
         <p:spPr bwMode="auto">
           <a:xfrm>
-            <a:off x="839788" y="457200"/>
+            <a:off x="839787" y="457200"/>
             <a:ext cx="3932237" cy="1600200"/>
           </a:xfrm>
         </p:spPr>
@@ -2855,7 +3027,7 @@
           <a:bodyPr anchor="b"/>
           <a:lstStyle>
             <a:lvl1pPr>
-              <a:defRPr sz="3200"/>
+              <a:defRPr sz="2400"/>
             </a:lvl1pPr>
           </a:lstStyle>
           <a:p>
@@ -2863,16 +3035,16 @@
               <a:defRPr/>
             </a:pPr>
             <a:r>
-              <a:rPr lang="en-US"/>
+              <a:rPr/>
               <a:t>Click to edit Master title style</a:t>
             </a:r>
-            <a:endParaRPr lang="en-US"/>
-          </a:p>
-        </p:txBody>
-      </p:sp>
-      <p:sp>
-        <p:nvSpPr>
-          <p:cNvPr id="1326599395" name="Picture Placeholder 2"/>
+            <a:endParaRPr/>
+          </a:p>
+        </p:txBody>
+      </p:sp>
+      <p:sp>
+        <p:nvSpPr>
+          <p:cNvPr id="1303622002" name="Picture Placeholder 2"/>
           <p:cNvSpPr>
             <a:spLocks noChangeAspect="1" noGrp="1"/>
           </p:cNvSpPr>
@@ -2882,7 +3054,7 @@
         </p:nvSpPr>
         <p:spPr bwMode="auto">
           <a:xfrm>
-            <a:off x="5183188" y="987425"/>
+            <a:off x="5183187" y="987425"/>
             <a:ext cx="6172200" cy="4873625"/>
           </a:xfrm>
         </p:spPr>
@@ -2891,39 +3063,39 @@
           <a:lstStyle>
             <a:lvl1pPr marL="0" indent="0">
               <a:buNone/>
-              <a:defRPr sz="3200"/>
+              <a:defRPr sz="2400"/>
             </a:lvl1pPr>
-            <a:lvl2pPr marL="457200" indent="0">
-              <a:buNone/>
-              <a:defRPr sz="2800"/>
+            <a:lvl2pPr marL="342900" indent="0">
+              <a:buNone/>
+              <a:defRPr sz="2100"/>
             </a:lvl2pPr>
-            <a:lvl3pPr marL="914400" indent="0">
-              <a:buNone/>
-              <a:defRPr sz="2400"/>
+            <a:lvl3pPr marL="685800" indent="0">
+              <a:buNone/>
+              <a:defRPr sz="1800"/>
             </a:lvl3pPr>
-            <a:lvl4pPr marL="1371600" indent="0">
-              <a:buNone/>
-              <a:defRPr sz="2000"/>
+            <a:lvl4pPr marL="1028700" indent="0">
+              <a:buNone/>
+              <a:defRPr sz="1500"/>
             </a:lvl4pPr>
-            <a:lvl5pPr marL="1828800" indent="0">
-              <a:buNone/>
-              <a:defRPr sz="2000"/>
+            <a:lvl5pPr marL="1371600" indent="0">
+              <a:buNone/>
+              <a:defRPr sz="1500"/>
             </a:lvl5pPr>
-            <a:lvl6pPr marL="2286000" indent="0">
-              <a:buNone/>
-              <a:defRPr sz="2000"/>
+            <a:lvl6pPr marL="1714500" indent="0">
+              <a:buNone/>
+              <a:defRPr sz="1500"/>
             </a:lvl6pPr>
-            <a:lvl7pPr marL="2743200" indent="0">
-              <a:buNone/>
-              <a:defRPr sz="2000"/>
+            <a:lvl7pPr marL="2057400" indent="0">
+              <a:buNone/>
+              <a:defRPr sz="1500"/>
             </a:lvl7pPr>
-            <a:lvl8pPr marL="3200400" indent="0">
-              <a:buNone/>
-              <a:defRPr sz="2000"/>
+            <a:lvl8pPr marL="2400300" indent="0">
+              <a:buNone/>
+              <a:defRPr sz="1500"/>
             </a:lvl8pPr>
-            <a:lvl9pPr marL="3657600" indent="0">
-              <a:buNone/>
-              <a:defRPr sz="2000"/>
+            <a:lvl9pPr marL="2743200" indent="0">
+              <a:buNone/>
+              <a:defRPr sz="1500"/>
             </a:lvl9pPr>
           </a:lstStyle>
           <a:p>
@@ -2931,16 +3103,16 @@
               <a:defRPr/>
             </a:pPr>
             <a:r>
-              <a:rPr lang="en-US"/>
+              <a:rPr/>
               <a:t>Click icon to add picture</a:t>
             </a:r>
-            <a:endParaRPr lang="en-US"/>
-          </a:p>
-        </p:txBody>
-      </p:sp>
-      <p:sp>
-        <p:nvSpPr>
-          <p:cNvPr id="1065183250" name="Text Placeholder 3"/>
+            <a:endParaRPr/>
+          </a:p>
+        </p:txBody>
+      </p:sp>
+      <p:sp>
+        <p:nvSpPr>
+          <p:cNvPr id="253623652" name="Text Placeholder 3"/>
           <p:cNvSpPr>
             <a:spLocks noGrp="1"/>
           </p:cNvSpPr>
@@ -2950,8 +3122,8 @@
         </p:nvSpPr>
         <p:spPr bwMode="auto">
           <a:xfrm>
-            <a:off x="839788" y="2057400"/>
-            <a:ext cx="3932237" cy="3811588"/>
+            <a:off x="839787" y="2057399"/>
+            <a:ext cx="3932237" cy="3811587"/>
           </a:xfrm>
         </p:spPr>
         <p:txBody>
@@ -2959,39 +3131,39 @@
           <a:lstStyle>
             <a:lvl1pPr marL="0" indent="0">
               <a:buNone/>
-              <a:defRPr sz="1600"/>
+              <a:defRPr sz="1200"/>
             </a:lvl1pPr>
-            <a:lvl2pPr marL="457200" indent="0">
-              <a:buNone/>
-              <a:defRPr sz="1400"/>
+            <a:lvl2pPr marL="342900" indent="0">
+              <a:buNone/>
+              <a:defRPr sz="1050"/>
             </a:lvl2pPr>
-            <a:lvl3pPr marL="914400" indent="0">
-              <a:buNone/>
-              <a:defRPr sz="1200"/>
+            <a:lvl3pPr marL="685800" indent="0">
+              <a:buNone/>
+              <a:defRPr sz="900"/>
             </a:lvl3pPr>
-            <a:lvl4pPr marL="1371600" indent="0">
-              <a:buNone/>
-              <a:defRPr sz="1000"/>
+            <a:lvl4pPr marL="1028700" indent="0">
+              <a:buNone/>
+              <a:defRPr sz="750"/>
             </a:lvl4pPr>
-            <a:lvl5pPr marL="1828800" indent="0">
-              <a:buNone/>
-              <a:defRPr sz="1000"/>
+            <a:lvl5pPr marL="1371600" indent="0">
+              <a:buNone/>
+              <a:defRPr sz="750"/>
             </a:lvl5pPr>
-            <a:lvl6pPr marL="2286000" indent="0">
-              <a:buNone/>
-              <a:defRPr sz="1000"/>
+            <a:lvl6pPr marL="1714500" indent="0">
+              <a:buNone/>
+              <a:defRPr sz="750"/>
             </a:lvl6pPr>
-            <a:lvl7pPr marL="2743200" indent="0">
-              <a:buNone/>
-              <a:defRPr sz="1000"/>
+            <a:lvl7pPr marL="2057400" indent="0">
+              <a:buNone/>
+              <a:defRPr sz="750"/>
             </a:lvl7pPr>
-            <a:lvl8pPr marL="3200400" indent="0">
-              <a:buNone/>
-              <a:defRPr sz="1000"/>
+            <a:lvl8pPr marL="2400300" indent="0">
+              <a:buNone/>
+              <a:defRPr sz="750"/>
             </a:lvl8pPr>
-            <a:lvl9pPr marL="3657600" indent="0">
-              <a:buNone/>
-              <a:defRPr sz="1000"/>
+            <a:lvl9pPr marL="2743200" indent="0">
+              <a:buNone/>
+              <a:defRPr sz="750"/>
             </a:lvl9pPr>
           </a:lstStyle>
           <a:p>
@@ -2999,7 +3171,7 @@
               <a:defRPr/>
             </a:pPr>
             <a:r>
-              <a:rPr lang="en-US"/>
+              <a:rPr/>
               <a:t>Click to edit Master text styles</a:t>
             </a:r>
             <a:endParaRPr/>
@@ -3008,7 +3180,7 @@
       </p:sp>
       <p:sp>
         <p:nvSpPr>
-          <p:cNvPr id="165163434" name="Date Placeholder 4"/>
+          <p:cNvPr id="999253395" name="Date Placeholder 4"/>
           <p:cNvSpPr>
             <a:spLocks noGrp="1"/>
           </p:cNvSpPr>
@@ -3025,16 +3197,16 @@
               <a:defRPr/>
             </a:pPr>
             <a:fld id="{BCC18F51-09EC-435C-A3BA-64A766E099C0}" type="datetimeFigureOut">
-              <a:rPr lang="en-US"/>
-              <a:t>30.10.2013</a:t>
+              <a:rPr/>
+              <a:t>01.11.2013</a:t>
             </a:fld>
-            <a:endParaRPr lang="en-US"/>
-          </a:p>
-        </p:txBody>
-      </p:sp>
-      <p:sp>
-        <p:nvSpPr>
-          <p:cNvPr id="1217457169" name="Footer Placeholder 5"/>
+            <a:endParaRPr/>
+          </a:p>
+        </p:txBody>
+      </p:sp>
+      <p:sp>
+        <p:nvSpPr>
+          <p:cNvPr id="1416477406" name="Footer Placeholder 5"/>
           <p:cNvSpPr>
             <a:spLocks noGrp="1"/>
           </p:cNvSpPr>
@@ -3050,13 +3222,13 @@
             <a:pPr>
               <a:defRPr/>
             </a:pPr>
-            <a:endParaRPr lang="en-US"/>
-          </a:p>
-        </p:txBody>
-      </p:sp>
-      <p:sp>
-        <p:nvSpPr>
-          <p:cNvPr id="1619345905" name="Slide Number Placeholder 6"/>
+            <a:endParaRPr/>
+          </a:p>
+        </p:txBody>
+      </p:sp>
+      <p:sp>
+        <p:nvSpPr>
+          <p:cNvPr id="2116222469" name="Slide Number Placeholder 6"/>
           <p:cNvSpPr>
             <a:spLocks noGrp="1"/>
           </p:cNvSpPr>
@@ -3073,10 +3245,10 @@
               <a:defRPr/>
             </a:pPr>
             <a:fld id="{08395586-F03A-48D1-94DF-16B239DF4FB5}" type="slidenum">
-              <a:rPr lang="en-US"/>
+              <a:rPr/>
               <a:t>‹#›</a:t>
             </a:fld>
-            <a:endParaRPr lang="en-US"/>
+            <a:endParaRPr/>
           </a:p>
         </p:txBody>
       </p:sp>
@@ -3112,7 +3284,7 @@
       </p:grpSpPr>
       <p:sp>
         <p:nvSpPr>
-          <p:cNvPr id="37640357" name="Title Placeholder 1"/>
+          <p:cNvPr id="756292750" name="Title Placeholder 1"/>
           <p:cNvSpPr>
             <a:spLocks noGrp="1"/>
           </p:cNvSpPr>
@@ -3122,8 +3294,8 @@
         </p:nvSpPr>
         <p:spPr bwMode="auto">
           <a:xfrm>
-            <a:off x="838200" y="365125"/>
-            <a:ext cx="10515600" cy="1325563"/>
+            <a:off x="838199" y="365125"/>
+            <a:ext cx="10515600" cy="1325562"/>
           </a:xfrm>
           <a:prstGeom prst="rect">
             <a:avLst/>
@@ -3139,16 +3311,16 @@
               <a:defRPr/>
             </a:pPr>
             <a:r>
-              <a:rPr lang="en-US"/>
+              <a:rPr/>
               <a:t>Click to edit Master title style</a:t>
             </a:r>
-            <a:endParaRPr lang="en-US"/>
-          </a:p>
-        </p:txBody>
-      </p:sp>
-      <p:sp>
-        <p:nvSpPr>
-          <p:cNvPr id="726088821" name="Text Placeholder 2"/>
+            <a:endParaRPr/>
+          </a:p>
+        </p:txBody>
+      </p:sp>
+      <p:sp>
+        <p:nvSpPr>
+          <p:cNvPr id="1536542978" name="Text Placeholder 2"/>
           <p:cNvSpPr>
             <a:spLocks noGrp="1"/>
           </p:cNvSpPr>
@@ -3158,7 +3330,7 @@
         </p:nvSpPr>
         <p:spPr bwMode="auto">
           <a:xfrm>
-            <a:off x="838200" y="1825625"/>
+            <a:off x="838199" y="1825625"/>
             <a:ext cx="10515600" cy="4351338"/>
           </a:xfrm>
           <a:prstGeom prst="rect">
@@ -3175,7 +3347,7 @@
               <a:defRPr/>
             </a:pPr>
             <a:r>
-              <a:rPr lang="en-US"/>
+              <a:rPr/>
               <a:t>Click to edit Master text styles</a:t>
             </a:r>
             <a:endParaRPr/>
@@ -3185,7 +3357,7 @@
               <a:defRPr/>
             </a:pPr>
             <a:r>
-              <a:rPr lang="en-US"/>
+              <a:rPr/>
               <a:t>Second level</a:t>
             </a:r>
             <a:endParaRPr/>
@@ -3195,7 +3367,7 @@
               <a:defRPr/>
             </a:pPr>
             <a:r>
-              <a:rPr lang="en-US"/>
+              <a:rPr/>
               <a:t>Third level</a:t>
             </a:r>
             <a:endParaRPr/>
@@ -3205,7 +3377,7 @@
               <a:defRPr/>
             </a:pPr>
             <a:r>
-              <a:rPr lang="en-US"/>
+              <a:rPr/>
               <a:t>Fourth level</a:t>
             </a:r>
             <a:endParaRPr/>
@@ -3215,16 +3387,16 @@
               <a:defRPr/>
             </a:pPr>
             <a:r>
-              <a:rPr lang="en-US"/>
+              <a:rPr/>
               <a:t>Fifth level</a:t>
             </a:r>
-            <a:endParaRPr lang="en-US"/>
-          </a:p>
-        </p:txBody>
-      </p:sp>
-      <p:sp>
-        <p:nvSpPr>
-          <p:cNvPr id="1428638893" name="Date Placeholder 3"/>
+            <a:endParaRPr/>
+          </a:p>
+        </p:txBody>
+      </p:sp>
+      <p:sp>
+        <p:nvSpPr>
+          <p:cNvPr id="588118227" name="Date Placeholder 3"/>
           <p:cNvSpPr>
             <a:spLocks noGrp="1"/>
           </p:cNvSpPr>
@@ -3234,7 +3406,7 @@
         </p:nvSpPr>
         <p:spPr bwMode="auto">
           <a:xfrm>
-            <a:off x="838200" y="6356350"/>
+            <a:off x="838199" y="6356350"/>
             <a:ext cx="2743200" cy="365125"/>
           </a:xfrm>
           <a:prstGeom prst="rect">
@@ -3245,7 +3417,7 @@
           <a:bodyPr vert="horz" lIns="91440" tIns="45720" rIns="91440" bIns="45720" rtlCol="0" anchor="ctr"/>
           <a:lstStyle>
             <a:lvl1pPr algn="l">
-              <a:defRPr sz="1200">
+              <a:defRPr sz="900">
                 <a:solidFill>
                   <a:schemeClr val="tx1">
                     <a:tint val="75000"/>
@@ -3259,16 +3431,16 @@
               <a:defRPr/>
             </a:pPr>
             <a:fld id="{BCC18F51-09EC-435C-A3BA-64A766E099C0}" type="datetimeFigureOut">
-              <a:rPr lang="en-US"/>
-              <a:t>30.10.2013</a:t>
+              <a:rPr/>
+              <a:t>01.11.2013</a:t>
             </a:fld>
-            <a:endParaRPr lang="en-US"/>
-          </a:p>
-        </p:txBody>
-      </p:sp>
-      <p:sp>
-        <p:nvSpPr>
-          <p:cNvPr id="1916569830" name="Footer Placeholder 4"/>
+            <a:endParaRPr/>
+          </a:p>
+        </p:txBody>
+      </p:sp>
+      <p:sp>
+        <p:nvSpPr>
+          <p:cNvPr id="1920593092" name="Footer Placeholder 4"/>
           <p:cNvSpPr>
             <a:spLocks noGrp="1"/>
           </p:cNvSpPr>
@@ -3278,7 +3450,7 @@
         </p:nvSpPr>
         <p:spPr bwMode="auto">
           <a:xfrm>
-            <a:off x="4038600" y="6356350"/>
+            <a:off x="4038599" y="6356350"/>
             <a:ext cx="4114800" cy="365125"/>
           </a:xfrm>
           <a:prstGeom prst="rect">
@@ -3289,7 +3461,7 @@
           <a:bodyPr vert="horz" lIns="91440" tIns="45720" rIns="91440" bIns="45720" rtlCol="0" anchor="ctr"/>
           <a:lstStyle>
             <a:lvl1pPr algn="ctr">
-              <a:defRPr sz="1200">
+              <a:defRPr sz="900">
                 <a:solidFill>
                   <a:schemeClr val="tx1">
                     <a:tint val="75000"/>
@@ -3302,13 +3474,13 @@
             <a:pPr>
               <a:defRPr/>
             </a:pPr>
-            <a:endParaRPr lang="en-US"/>
-          </a:p>
-        </p:txBody>
-      </p:sp>
-      <p:sp>
-        <p:nvSpPr>
-          <p:cNvPr id="161778917" name="Slide Number Placeholder 5"/>
+            <a:endParaRPr/>
+          </a:p>
+        </p:txBody>
+      </p:sp>
+      <p:sp>
+        <p:nvSpPr>
+          <p:cNvPr id="1430661242" name="Slide Number Placeholder 5"/>
           <p:cNvSpPr>
             <a:spLocks noGrp="1"/>
           </p:cNvSpPr>
@@ -3329,7 +3501,7 @@
           <a:bodyPr vert="horz" lIns="91440" tIns="45720" rIns="91440" bIns="45720" rtlCol="0" anchor="ctr"/>
           <a:lstStyle>
             <a:lvl1pPr algn="r">
-              <a:defRPr sz="1200">
+              <a:defRPr sz="900">
                 <a:solidFill>
                   <a:schemeClr val="tx1">
                     <a:tint val="75000"/>
@@ -3343,10 +3515,10 @@
               <a:defRPr/>
             </a:pPr>
             <a:fld id="{08395586-F03A-48D1-94DF-16B239DF4FB5}" type="slidenum">
-              <a:rPr lang="en-US"/>
+              <a:rPr/>
               <a:t>‹#›</a:t>
             </a:fld>
-            <a:endParaRPr lang="en-US"/>
+            <a:endParaRPr/>
           </a:p>
         </p:txBody>
       </p:sp>
@@ -3368,7 +3540,7 @@
   </p:sldLayoutIdLst>
   <p:txStyles>
     <p:titleStyle>
-      <a:lvl1pPr algn="l" defTabSz="914400" rtl="0">
+      <a:lvl1pPr algn="l" defTabSz="685800" rtl="0">
         <a:lnSpc>
           <a:spcPct val="90000"/>
         </a:lnSpc>
@@ -3376,7 +3548,7 @@
           <a:spcPts val="0"/>
         </a:spcBef>
         <a:buNone/>
-        <a:defRPr sz="4400">
+        <a:defRPr sz="3300">
           <a:solidFill>
             <a:schemeClr val="tx1"/>
           </a:solidFill>
@@ -3387,16 +3559,16 @@
       </a:lvl1pPr>
     </p:titleStyle>
     <p:bodyStyle>
-      <a:lvl1pPr marL="228600" indent="-228600" algn="l" defTabSz="914400" rtl="0">
+      <a:lvl1pPr marL="171450" indent="-171450" algn="l" defTabSz="685800" rtl="0">
         <a:lnSpc>
           <a:spcPct val="90000"/>
         </a:lnSpc>
         <a:spcBef>
-          <a:spcPts val="1000"/>
+          <a:spcPts val="749"/>
         </a:spcBef>
         <a:buFont typeface="Arial"/>
         <a:buChar char="•"/>
-        <a:defRPr sz="2800">
+        <a:defRPr sz="2100">
           <a:solidFill>
             <a:schemeClr val="tx1"/>
           </a:solidFill>
@@ -3405,48 +3577,12 @@
           <a:cs typeface="+mn-cs"/>
         </a:defRPr>
       </a:lvl1pPr>
-      <a:lvl2pPr marL="685800" indent="-228600" algn="l" defTabSz="914400" rtl="0">
+      <a:lvl2pPr marL="514350" indent="-171450" algn="l" defTabSz="685800" rtl="0">
         <a:lnSpc>
           <a:spcPct val="90000"/>
         </a:lnSpc>
         <a:spcBef>
-          <a:spcPts val="500"/>
-        </a:spcBef>
-        <a:buFont typeface="Arial"/>
-        <a:buChar char="•"/>
-        <a:defRPr sz="2400">
-          <a:solidFill>
-            <a:schemeClr val="tx1"/>
-          </a:solidFill>
-          <a:latin typeface="+mn-lt"/>
-          <a:ea typeface="+mn-ea"/>
-          <a:cs typeface="+mn-cs"/>
-        </a:defRPr>
-      </a:lvl2pPr>
-      <a:lvl3pPr marL="1143000" indent="-228600" algn="l" defTabSz="914400" rtl="0">
-        <a:lnSpc>
-          <a:spcPct val="90000"/>
-        </a:lnSpc>
-        <a:spcBef>
-          <a:spcPts val="500"/>
-        </a:spcBef>
-        <a:buFont typeface="Arial"/>
-        <a:buChar char="•"/>
-        <a:defRPr sz="2000">
-          <a:solidFill>
-            <a:schemeClr val="tx1"/>
-          </a:solidFill>
-          <a:latin typeface="+mn-lt"/>
-          <a:ea typeface="+mn-ea"/>
-          <a:cs typeface="+mn-cs"/>
-        </a:defRPr>
-      </a:lvl3pPr>
-      <a:lvl4pPr marL="1600200" indent="-228600" algn="l" defTabSz="914400" rtl="0">
-        <a:lnSpc>
-          <a:spcPct val="90000"/>
-        </a:lnSpc>
-        <a:spcBef>
-          <a:spcPts val="500"/>
+          <a:spcPts val="374"/>
         </a:spcBef>
         <a:buFont typeface="Arial"/>
         <a:buChar char="•"/>
@@ -3458,17 +3594,53 @@
           <a:ea typeface="+mn-ea"/>
           <a:cs typeface="+mn-cs"/>
         </a:defRPr>
-      </a:lvl4pPr>
-      <a:lvl5pPr marL="2057400" indent="-228600" algn="l" defTabSz="914400" rtl="0">
+      </a:lvl2pPr>
+      <a:lvl3pPr marL="857250" indent="-171450" algn="l" defTabSz="685800" rtl="0">
         <a:lnSpc>
           <a:spcPct val="90000"/>
         </a:lnSpc>
         <a:spcBef>
-          <a:spcPts val="500"/>
+          <a:spcPts val="374"/>
         </a:spcBef>
         <a:buFont typeface="Arial"/>
         <a:buChar char="•"/>
-        <a:defRPr sz="1800">
+        <a:defRPr sz="1500">
+          <a:solidFill>
+            <a:schemeClr val="tx1"/>
+          </a:solidFill>
+          <a:latin typeface="+mn-lt"/>
+          <a:ea typeface="+mn-ea"/>
+          <a:cs typeface="+mn-cs"/>
+        </a:defRPr>
+      </a:lvl3pPr>
+      <a:lvl4pPr marL="1200150" indent="-171450" algn="l" defTabSz="685800" rtl="0">
+        <a:lnSpc>
+          <a:spcPct val="90000"/>
+        </a:lnSpc>
+        <a:spcBef>
+          <a:spcPts val="374"/>
+        </a:spcBef>
+        <a:buFont typeface="Arial"/>
+        <a:buChar char="•"/>
+        <a:defRPr sz="1350">
+          <a:solidFill>
+            <a:schemeClr val="tx1"/>
+          </a:solidFill>
+          <a:latin typeface="+mn-lt"/>
+          <a:ea typeface="+mn-ea"/>
+          <a:cs typeface="+mn-cs"/>
+        </a:defRPr>
+      </a:lvl4pPr>
+      <a:lvl5pPr marL="1543050" indent="-171450" algn="l" defTabSz="685800" rtl="0">
+        <a:lnSpc>
+          <a:spcPct val="90000"/>
+        </a:lnSpc>
+        <a:spcBef>
+          <a:spcPts val="374"/>
+        </a:spcBef>
+        <a:buFont typeface="Arial"/>
+        <a:buChar char="•"/>
+        <a:defRPr sz="1350">
           <a:solidFill>
             <a:schemeClr val="tx1"/>
           </a:solidFill>
@@ -3477,16 +3649,16 @@
           <a:cs typeface="+mn-cs"/>
         </a:defRPr>
       </a:lvl5pPr>
-      <a:lvl6pPr marL="2514600" indent="-228600" algn="l" defTabSz="914400" rtl="0">
+      <a:lvl6pPr marL="1885950" indent="-171450" algn="l" defTabSz="685800" rtl="0">
         <a:lnSpc>
           <a:spcPct val="90000"/>
         </a:lnSpc>
         <a:spcBef>
-          <a:spcPts val="500"/>
+          <a:spcPts val="374"/>
         </a:spcBef>
         <a:buFont typeface="Arial"/>
         <a:buChar char="•"/>
-        <a:defRPr sz="1800">
+        <a:defRPr sz="1350">
           <a:solidFill>
             <a:schemeClr val="tx1"/>
           </a:solidFill>
@@ -3495,16 +3667,16 @@
           <a:cs typeface="+mn-cs"/>
         </a:defRPr>
       </a:lvl6pPr>
-      <a:lvl7pPr marL="2971800" indent="-228600" algn="l" defTabSz="914400" rtl="0">
+      <a:lvl7pPr marL="2228850" indent="-171450" algn="l" defTabSz="685800" rtl="0">
         <a:lnSpc>
           <a:spcPct val="90000"/>
         </a:lnSpc>
         <a:spcBef>
-          <a:spcPts val="500"/>
+          <a:spcPts val="374"/>
         </a:spcBef>
         <a:buFont typeface="Arial"/>
         <a:buChar char="•"/>
-        <a:defRPr sz="1800">
+        <a:defRPr sz="1350">
           <a:solidFill>
             <a:schemeClr val="tx1"/>
           </a:solidFill>
@@ -3513,16 +3685,16 @@
           <a:cs typeface="+mn-cs"/>
         </a:defRPr>
       </a:lvl7pPr>
-      <a:lvl8pPr marL="3429000" indent="-228600" algn="l" defTabSz="914400" rtl="0">
+      <a:lvl8pPr marL="2571750" indent="-171450" algn="l" defTabSz="685800" rtl="0">
         <a:lnSpc>
           <a:spcPct val="90000"/>
         </a:lnSpc>
         <a:spcBef>
-          <a:spcPts val="500"/>
+          <a:spcPts val="374"/>
         </a:spcBef>
         <a:buFont typeface="Arial"/>
         <a:buChar char="•"/>
-        <a:defRPr sz="1800">
+        <a:defRPr sz="1350">
           <a:solidFill>
             <a:schemeClr val="tx1"/>
           </a:solidFill>
@@ -3531,16 +3703,16 @@
           <a:cs typeface="+mn-cs"/>
         </a:defRPr>
       </a:lvl8pPr>
-      <a:lvl9pPr marL="3886200" indent="-228600" algn="l" defTabSz="914400" rtl="0">
+      <a:lvl9pPr marL="2914650" indent="-171450" algn="l" defTabSz="685800" rtl="0">
         <a:lnSpc>
           <a:spcPct val="90000"/>
         </a:lnSpc>
         <a:spcBef>
-          <a:spcPts val="500"/>
+          <a:spcPts val="374"/>
         </a:spcBef>
         <a:buFont typeface="Arial"/>
         <a:buChar char="•"/>
-        <a:defRPr sz="1800">
+        <a:defRPr sz="1350">
           <a:solidFill>
             <a:schemeClr val="tx1"/>
           </a:solidFill>
@@ -3552,10 +3724,10 @@
     </p:bodyStyle>
     <p:otherStyle>
       <a:defPPr>
-        <a:defRPr lang="en-US"/>
+        <a:defRPr/>
       </a:defPPr>
-      <a:lvl1pPr marL="0" algn="l" defTabSz="914400" rtl="0">
-        <a:defRPr sz="1800">
+      <a:lvl1pPr marL="0" algn="l" defTabSz="685800" rtl="0">
+        <a:defRPr sz="1350">
           <a:solidFill>
             <a:schemeClr val="tx1"/>
           </a:solidFill>
@@ -3564,8 +3736,8 @@
           <a:cs typeface="+mn-cs"/>
         </a:defRPr>
       </a:lvl1pPr>
-      <a:lvl2pPr marL="457200" algn="l" defTabSz="914400" rtl="0">
-        <a:defRPr sz="1800">
+      <a:lvl2pPr marL="342900" algn="l" defTabSz="685800" rtl="0">
+        <a:defRPr sz="1350">
           <a:solidFill>
             <a:schemeClr val="tx1"/>
           </a:solidFill>
@@ -3574,8 +3746,8 @@
           <a:cs typeface="+mn-cs"/>
         </a:defRPr>
       </a:lvl2pPr>
-      <a:lvl3pPr marL="914400" algn="l" defTabSz="914400" rtl="0">
-        <a:defRPr sz="1800">
+      <a:lvl3pPr marL="685800" algn="l" defTabSz="685800" rtl="0">
+        <a:defRPr sz="1350">
           <a:solidFill>
             <a:schemeClr val="tx1"/>
           </a:solidFill>
@@ -3584,8 +3756,8 @@
           <a:cs typeface="+mn-cs"/>
         </a:defRPr>
       </a:lvl3pPr>
-      <a:lvl4pPr marL="1371600" algn="l" defTabSz="914400" rtl="0">
-        <a:defRPr sz="1800">
+      <a:lvl4pPr marL="1028700" algn="l" defTabSz="685800" rtl="0">
+        <a:defRPr sz="1350">
           <a:solidFill>
             <a:schemeClr val="tx1"/>
           </a:solidFill>
@@ -3594,8 +3766,8 @@
           <a:cs typeface="+mn-cs"/>
         </a:defRPr>
       </a:lvl4pPr>
-      <a:lvl5pPr marL="1828800" algn="l" defTabSz="914400" rtl="0">
-        <a:defRPr sz="1800">
+      <a:lvl5pPr marL="1371600" algn="l" defTabSz="685800" rtl="0">
+        <a:defRPr sz="1350">
           <a:solidFill>
             <a:schemeClr val="tx1"/>
           </a:solidFill>
@@ -3604,8 +3776,8 @@
           <a:cs typeface="+mn-cs"/>
         </a:defRPr>
       </a:lvl5pPr>
-      <a:lvl6pPr marL="2286000" algn="l" defTabSz="914400" rtl="0">
-        <a:defRPr sz="1800">
+      <a:lvl6pPr marL="1714500" algn="l" defTabSz="685800" rtl="0">
+        <a:defRPr sz="1350">
           <a:solidFill>
             <a:schemeClr val="tx1"/>
           </a:solidFill>
@@ -3614,8 +3786,8 @@
           <a:cs typeface="+mn-cs"/>
         </a:defRPr>
       </a:lvl6pPr>
-      <a:lvl7pPr marL="2743200" algn="l" defTabSz="914400" rtl="0">
-        <a:defRPr sz="1800">
+      <a:lvl7pPr marL="2057400" algn="l" defTabSz="685800" rtl="0">
+        <a:defRPr sz="1350">
           <a:solidFill>
             <a:schemeClr val="tx1"/>
           </a:solidFill>
@@ -3624,8 +3796,8 @@
           <a:cs typeface="+mn-cs"/>
         </a:defRPr>
       </a:lvl7pPr>
-      <a:lvl8pPr marL="3200400" algn="l" defTabSz="914400" rtl="0">
-        <a:defRPr sz="1800">
+      <a:lvl8pPr marL="2400300" algn="l" defTabSz="685800" rtl="0">
+        <a:defRPr sz="1350">
           <a:solidFill>
             <a:schemeClr val="tx1"/>
           </a:solidFill>
@@ -3634,8 +3806,8 @@
           <a:cs typeface="+mn-cs"/>
         </a:defRPr>
       </a:lvl8pPr>
-      <a:lvl9pPr marL="3657600" algn="l" defTabSz="914400" rtl="0">
-        <a:defRPr sz="1800">
+      <a:lvl9pPr marL="2743200" algn="l" defTabSz="685800" rtl="0">
+        <a:defRPr sz="1350">
           <a:solidFill>
             <a:schemeClr val="tx1"/>
           </a:solidFill>
@@ -3668,7 +3840,7 @@
       </p:grpSpPr>
       <p:sp>
         <p:nvSpPr>
-          <p:cNvPr id="203800066" name="Title 1"/>
+          <p:cNvPr id="1018712622" name="Title 1"/>
           <p:cNvSpPr>
             <a:spLocks noGrp="1"/>
           </p:cNvSpPr>
@@ -3701,7 +3873,7 @@
       </p:sp>
       <p:sp>
         <p:nvSpPr>
-          <p:cNvPr id="1097387446" name="Subtitle 2"/>
+          <p:cNvPr id="499625544" name="Subtitle 2"/>
           <p:cNvSpPr>
             <a:spLocks noGrp="1"/>
           </p:cNvSpPr>
@@ -3731,6 +3903,307 @@
             <a:endParaRPr lang="en-US"/>
           </a:p>
         </p:txBody>
+      </p:sp>
+    </p:spTree>
+  </p:cSld>
+  <p:clrMapOvr>
+    <a:masterClrMapping/>
+  </p:clrMapOvr>
+  <mc:AlternateContent xmlns:mc="http://schemas.openxmlformats.org/markup-compatibility/2006">
+    <mc:Choice xmlns:p159="http://schemas.microsoft.com/office/powerpoint/2015/09/main" xmlns:p14="http://schemas.microsoft.com/office/powerpoint/2010/main" Requires="p159">
+      <p:transition p14:dur="2000" advClick="1"/>
+    </mc:Choice>
+    <mc:Fallback>
+      <p:transition advClick="1"/>
+    </mc:Fallback>
+  </mc:AlternateContent>
+</p:sld>
+</file>
+
+<file path=ppt/slides/slide2.xml><?xml version="1.0" encoding="utf-8"?>
+<p:sld xmlns:a="http://schemas.openxmlformats.org/drawingml/2006/main" xmlns:r="http://schemas.openxmlformats.org/officeDocument/2006/relationships" xmlns:p="http://schemas.openxmlformats.org/presentationml/2006/main" xmlns:m="http://schemas.openxmlformats.org/officeDocument/2006/math" xmlns:w="http://schemas.openxmlformats.org/wordprocessingml/2006/main" xmlns:mc="http://schemas.openxmlformats.org/markup-compatibility/2006" showMasterPhAnim="0" showMasterSp="1" show="1">
+  <p:cSld name="">
+    <p:spTree>
+      <p:nvGrpSpPr>
+        <p:cNvPr id="1" name=""/>
+        <p:cNvGrpSpPr/>
+        <p:nvPr/>
+      </p:nvGrpSpPr>
+      <p:grpSpPr bwMode="auto">
+        <a:xfrm>
+          <a:off x="0" y="0"/>
+          <a:ext cx="0" cy="0"/>
+          <a:chOff x="0" y="0"/>
+          <a:chExt cx="0" cy="0"/>
+        </a:xfrm>
+      </p:grpSpPr>
+      <p:sp>
+        <p:nvSpPr>
+          <p:cNvPr id="1917441522" name="Title 1"/>
+          <p:cNvSpPr>
+            <a:spLocks noGrp="1"/>
+          </p:cNvSpPr>
+          <p:nvPr>
+            <p:ph type="title"/>
+          </p:nvPr>
+        </p:nvSpPr>
+        <p:spPr bwMode="auto"/>
+        <p:txBody>
+          <a:bodyPr/>
+          <a:lstStyle/>
+          <a:p>
+            <a:pPr>
+              <a:defRPr/>
+            </a:pPr>
+            <a:r>
+              <a:rPr u="none"/>
+              <a:t>Interface 1.Subject</a:t>
+            </a:r>
+            <a:endParaRPr u="sng"/>
+          </a:p>
+        </p:txBody>
+      </p:sp>
+      <p:sp>
+        <p:nvSpPr>
+          <p:cNvPr id="1799011335" name="Content Placeholder 2"/>
+          <p:cNvSpPr>
+            <a:spLocks noGrp="1"/>
+          </p:cNvSpPr>
+          <p:nvPr>
+            <p:ph idx="1"/>
+          </p:nvPr>
+        </p:nvSpPr>
+        <p:spPr bwMode="auto"/>
+        <p:txBody>
+          <a:bodyPr/>
+          <a:lstStyle/>
+          <a:p>
+            <a:pPr>
+              <a:defRPr/>
+            </a:pPr>
+            <a:r>
+              <a:rPr lang="en-US" sz="2200" b="0" i="0" u="none" strike="noStrike" cap="none" spc="0">
+                <a:solidFill>
+                  <a:schemeClr val="tx1"/>
+                </a:solidFill>
+                <a:latin typeface="Arial"/>
+                <a:ea typeface="Arial"/>
+                <a:cs typeface="Arial"/>
+              </a:rPr>
+              <a:t>Defines the contract for any object that maintains a list of dependents, including methods to register, remove, and notify observers.</a:t>
+            </a:r>
+            <a:endParaRPr sz="1800"/>
+          </a:p>
+        </p:txBody>
+      </p:sp>
+      <p:pic>
+        <p:nvPicPr>
+          <p:cNvPr id="2087075144" name=""/>
+          <p:cNvPicPr>
+            <a:picLocks noChangeAspect="1"/>
+          </p:cNvPicPr>
+          <p:nvPr/>
+        </p:nvPicPr>
+        <p:blipFill rotWithShape="1">
+          <a:blip r:embed="rId3"/>
+          <a:stretch/>
+        </p:blipFill>
+        <p:spPr bwMode="auto">
+          <a:xfrm flipH="0" flipV="0">
+            <a:off x="1318560" y="3355900"/>
+            <a:ext cx="9040124" cy="2658139"/>
+          </a:xfrm>
+          <a:prstGeom prst="rect">
+            <a:avLst/>
+          </a:prstGeom>
+        </p:spPr>
+      </p:pic>
+      <p:sp>
+        <p:nvSpPr>
+          <p:cNvPr id="1682542063" name=""/>
+          <p:cNvSpPr/>
+          <p:nvPr/>
+        </p:nvSpPr>
+        <p:spPr bwMode="auto">
+          <a:xfrm rot="0" flipH="0" flipV="0">
+            <a:off x="-1320066" y="1273690"/>
+            <a:ext cx="14851694" cy="221510"/>
+          </a:xfrm>
+          <a:prstGeom prst="mathMinus">
+            <a:avLst>
+              <a:gd name="adj1" fmla="val 23520"/>
+            </a:avLst>
+          </a:prstGeom>
+        </p:spPr>
+        <p:style>
+          <a:lnRef idx="2">
+            <a:schemeClr val="accent1">
+              <a:shade val="50000"/>
+            </a:schemeClr>
+          </a:lnRef>
+          <a:fillRef idx="1">
+            <a:schemeClr val="accent1"/>
+          </a:fillRef>
+          <a:effectRef idx="0">
+            <a:schemeClr val="accent1"/>
+          </a:effectRef>
+          <a:fontRef idx="minor">
+            <a:schemeClr val="lt1"/>
+          </a:fontRef>
+        </p:style>
+      </p:sp>
+    </p:spTree>
+  </p:cSld>
+  <p:clrMapOvr>
+    <a:masterClrMapping/>
+  </p:clrMapOvr>
+  <mc:AlternateContent xmlns:mc="http://schemas.openxmlformats.org/markup-compatibility/2006">
+    <mc:Choice xmlns:p159="http://schemas.microsoft.com/office/powerpoint/2015/09/main" xmlns:p14="http://schemas.microsoft.com/office/powerpoint/2010/main" Requires="p159">
+      <p:transition p14:dur="2000" advClick="1"/>
+    </mc:Choice>
+    <mc:Fallback>
+      <p:transition advClick="1"/>
+    </mc:Fallback>
+  </mc:AlternateContent>
+</p:sld>
+</file>
+
+<file path=ppt/slides/slide3.xml><?xml version="1.0" encoding="utf-8"?>
+<p:sld xmlns:a="http://schemas.openxmlformats.org/drawingml/2006/main" xmlns:r="http://schemas.openxmlformats.org/officeDocument/2006/relationships" xmlns:p="http://schemas.openxmlformats.org/presentationml/2006/main" xmlns:m="http://schemas.openxmlformats.org/officeDocument/2006/math" xmlns:w="http://schemas.openxmlformats.org/wordprocessingml/2006/main" xmlns:mc="http://schemas.openxmlformats.org/markup-compatibility/2006" showMasterPhAnim="0" showMasterSp="1" show="1">
+  <p:cSld name="">
+    <p:spTree>
+      <p:nvGrpSpPr>
+        <p:cNvPr id="1" name=""/>
+        <p:cNvGrpSpPr/>
+        <p:nvPr/>
+      </p:nvGrpSpPr>
+      <p:grpSpPr bwMode="auto">
+        <a:xfrm>
+          <a:off x="0" y="0"/>
+          <a:ext cx="0" cy="0"/>
+          <a:chOff x="0" y="0"/>
+          <a:chExt cx="0" cy="0"/>
+        </a:xfrm>
+      </p:grpSpPr>
+      <p:sp>
+        <p:nvSpPr>
+          <p:cNvPr id="1279236651" name="Title 1"/>
+          <p:cNvSpPr>
+            <a:spLocks noGrp="1"/>
+          </p:cNvSpPr>
+          <p:nvPr>
+            <p:ph type="title"/>
+          </p:nvPr>
+        </p:nvSpPr>
+        <p:spPr bwMode="auto"/>
+        <p:txBody>
+          <a:bodyPr/>
+          <a:lstStyle/>
+          <a:p>
+            <a:pPr>
+              <a:defRPr/>
+            </a:pPr>
+            <a:r>
+              <a:rPr/>
+              <a:t>Interface 2. Observer</a:t>
+            </a:r>
+            <a:endParaRPr/>
+          </a:p>
+        </p:txBody>
+      </p:sp>
+      <p:sp>
+        <p:nvSpPr>
+          <p:cNvPr id="924926655" name="Content Placeholder 2"/>
+          <p:cNvSpPr>
+            <a:spLocks noGrp="1"/>
+          </p:cNvSpPr>
+          <p:nvPr>
+            <p:ph idx="1"/>
+          </p:nvPr>
+        </p:nvSpPr>
+        <p:spPr bwMode="auto">
+          <a:xfrm flipH="0" flipV="0">
+            <a:off x="838199" y="1825624"/>
+            <a:ext cx="10515600" cy="732834"/>
+          </a:xfrm>
+        </p:spPr>
+        <p:txBody>
+          <a:bodyPr/>
+          <a:lstStyle/>
+          <a:p>
+            <a:pPr>
+              <a:defRPr/>
+            </a:pPr>
+            <a:r>
+              <a:rPr lang="en-US" sz="2200" b="0" i="0" u="none" strike="noStrike" cap="none" spc="0">
+                <a:solidFill>
+                  <a:schemeClr val="tx1"/>
+                </a:solidFill>
+                <a:latin typeface="Arial"/>
+                <a:ea typeface="Arial"/>
+                <a:cs typeface="Arial"/>
+              </a:rPr>
+              <a:t>Provides the update() method signature, which includes fifteen weather-related parameters such as temperature, humidity, and wind speed.</a:t>
+            </a:r>
+            <a:endParaRPr sz="2200"/>
+          </a:p>
+        </p:txBody>
+      </p:sp>
+      <p:pic>
+        <p:nvPicPr>
+          <p:cNvPr id="194919984" name=""/>
+          <p:cNvPicPr>
+            <a:picLocks noChangeAspect="1"/>
+          </p:cNvPicPr>
+          <p:nvPr/>
+        </p:nvPicPr>
+        <p:blipFill rotWithShape="1">
+          <a:blip r:embed="rId3"/>
+          <a:stretch/>
+        </p:blipFill>
+        <p:spPr bwMode="auto">
+          <a:xfrm flipH="0" flipV="0">
+            <a:off x="838199" y="3429000"/>
+            <a:ext cx="10535162" cy="2474284"/>
+          </a:xfrm>
+          <a:prstGeom prst="rect">
+            <a:avLst/>
+          </a:prstGeom>
+        </p:spPr>
+      </p:pic>
+      <p:sp>
+        <p:nvSpPr>
+          <p:cNvPr id="430808913" name=""/>
+          <p:cNvSpPr/>
+          <p:nvPr/>
+        </p:nvSpPr>
+        <p:spPr bwMode="auto">
+          <a:xfrm rot="0" flipH="0" flipV="0">
+            <a:off x="-1320066" y="1273690"/>
+            <a:ext cx="14851695" cy="221510"/>
+          </a:xfrm>
+          <a:prstGeom prst="mathMinus">
+            <a:avLst>
+              <a:gd name="adj1" fmla="val 23520"/>
+            </a:avLst>
+          </a:prstGeom>
+        </p:spPr>
+        <p:style>
+          <a:lnRef idx="2">
+            <a:schemeClr val="accent1">
+              <a:shade val="50000"/>
+            </a:schemeClr>
+          </a:lnRef>
+          <a:fillRef idx="1">
+            <a:schemeClr val="accent1"/>
+          </a:fillRef>
+          <a:effectRef idx="0">
+            <a:schemeClr val="accent1"/>
+          </a:effectRef>
+          <a:fontRef idx="minor">
+            <a:schemeClr val="lt1"/>
+          </a:fontRef>
+        </p:style>
       </p:sp>
     </p:spTree>
   </p:cSld>
@@ -3749,9 +4222,9 @@
 </file>
 
 <file path=ppt/theme/theme1.xml><?xml version="1.0" encoding="utf-8"?>
-<a:theme xmlns:a="http://schemas.openxmlformats.org/drawingml/2006/main" xmlns:r="http://schemas.openxmlformats.org/officeDocument/2006/relationships" xmlns:p="http://schemas.openxmlformats.org/presentationml/2006/main" name="Office Theme">
+<a:theme xmlns:a="http://schemas.openxmlformats.org/drawingml/2006/main" xmlns:r="http://schemas.openxmlformats.org/officeDocument/2006/relationships" xmlns:p="http://schemas.openxmlformats.org/presentationml/2006/main" name="Blank">
   <a:themeElements>
-    <a:clrScheme name="New Office">
+    <a:clrScheme name="Office Theme">
       <a:dk1>
         <a:sysClr val="windowText" lastClr="000000"/>
       </a:dk1>
